--- a/exports/pptx/lessons/middle-module-14-magic-squares/day-10-summative-and-share.pptx
+++ b/exports/pptx/lessons/middle-module-14-magic-squares/day-10-summative-and-share.pptx
@@ -16,9 +16,11 @@
     <p:sldId id="264" r:id="rId10"/>
     <p:sldId id="265" r:id="rId11"/>
     <p:sldId id="266" r:id="rId12"/>
+    <p:sldId id="267" r:id="rId13"/>
+    <p:sldId id="268" r:id="rId14"/>
   </p:sldIdLst>
   <p:notesMasterIdLst>
-    <p:notesMasterId r:id="rId13"/>
+    <p:notesMasterId r:id="rId15"/>
   </p:notesMasterIdLst>
   <p:sldSz cx="9144000" cy="5143500"/>
   <p:notesSz cx="5143500" cy="9144000"/>
@@ -712,6 +714,182 @@
             <a:fld id="{F7021451-1387-4CA6-816F-3879F97B5CBC}" type="slidenum">
               <a:rPr lang="en-US"/>
               <a:t>11</a:t>
+            </a:fld>
+            <a:endParaRPr lang="en-US"/>
+          </a:p>
+        </p:txBody>
+      </p:sp>
+    </p:spTree>
+    <p:extLst>
+      <p:ext uri="{BB962C8B-B14F-4D97-AF65-F5344CB8AC3E}">
+        <p14:creationId xmlns:p14="http://schemas.microsoft.com/office/powerpoint/2010/main" val="1024086991"/>
+      </p:ext>
+    </p:extLst>
+  </p:cSld>
+  <p:clrMapOvr>
+    <a:masterClrMapping/>
+  </p:clrMapOvr>
+</p:notes>
+</file>
+
+<file path=ppt/notesSlides/notesSlide12.xml><?xml version="1.0" encoding="utf-8"?>
+<p:notes xmlns:a="http://schemas.openxmlformats.org/drawingml/2006/main" xmlns:r="http://schemas.openxmlformats.org/officeDocument/2006/relationships" xmlns:p="http://schemas.openxmlformats.org/presentationml/2006/main">
+  <p:cSld>
+    <p:spTree>
+      <p:nvGrpSpPr>
+        <p:cNvPr id="1" name=""/>
+        <p:cNvGrpSpPr/>
+        <p:nvPr/>
+      </p:nvGrpSpPr>
+      <p:grpSpPr>
+        <a:xfrm>
+          <a:off x="0" y="0"/>
+          <a:ext cx="0" cy="0"/>
+          <a:chOff x="0" y="0"/>
+          <a:chExt cx="0" cy="0"/>
+        </a:xfrm>
+      </p:grpSpPr>
+      <p:sp>
+        <p:nvSpPr>
+          <p:cNvPr id="2" name="Slide Image Placeholder 1"/>
+          <p:cNvSpPr>
+            <a:spLocks noGrp="1" noRot="1" noChangeAspect="1"/>
+          </p:cNvSpPr>
+          <p:nvPr>
+            <p:ph type="sldImg"/>
+          </p:nvPr>
+        </p:nvSpPr>
+        <p:spPr/>
+      </p:sp>
+      <p:sp>
+        <p:nvSpPr>
+          <p:cNvPr id="3" name="Notes Placeholder 2"/>
+          <p:cNvSpPr>
+            <a:spLocks noGrp="1"/>
+          </p:cNvSpPr>
+          <p:nvPr>
+            <p:ph type="body" idx="1"/>
+          </p:nvPr>
+        </p:nvSpPr>
+        <p:spPr/>
+        <p:txBody>
+          <a:bodyPr/>
+          <a:lstStyle/>
+          <a:p>
+            <a:r>
+              <a:rPr lang="en-US" dirty="0"/>
+              <a:t/>
+            </a:r>
+            <a:endParaRPr lang="en-US" dirty="0"/>
+          </a:p>
+        </p:txBody>
+      </p:sp>
+      <p:sp>
+        <p:nvSpPr>
+          <p:cNvPr id="4" name="Slide Number Placeholder 3"/>
+          <p:cNvSpPr>
+            <a:spLocks noGrp="1"/>
+          </p:cNvSpPr>
+          <p:nvPr>
+            <p:ph type="sldNum" sz="quarter" idx="10"/>
+          </p:nvPr>
+        </p:nvSpPr>
+        <p:spPr/>
+        <p:txBody>
+          <a:bodyPr/>
+          <a:lstStyle/>
+          <a:p>
+            <a:fld id="{F7021451-1387-4CA6-816F-3879F97B5CBC}" type="slidenum">
+              <a:rPr lang="en-US"/>
+              <a:t>12</a:t>
+            </a:fld>
+            <a:endParaRPr lang="en-US"/>
+          </a:p>
+        </p:txBody>
+      </p:sp>
+    </p:spTree>
+    <p:extLst>
+      <p:ext uri="{BB962C8B-B14F-4D97-AF65-F5344CB8AC3E}">
+        <p14:creationId xmlns:p14="http://schemas.microsoft.com/office/powerpoint/2010/main" val="1024086991"/>
+      </p:ext>
+    </p:extLst>
+  </p:cSld>
+  <p:clrMapOvr>
+    <a:masterClrMapping/>
+  </p:clrMapOvr>
+</p:notes>
+</file>
+
+<file path=ppt/notesSlides/notesSlide13.xml><?xml version="1.0" encoding="utf-8"?>
+<p:notes xmlns:a="http://schemas.openxmlformats.org/drawingml/2006/main" xmlns:r="http://schemas.openxmlformats.org/officeDocument/2006/relationships" xmlns:p="http://schemas.openxmlformats.org/presentationml/2006/main">
+  <p:cSld>
+    <p:spTree>
+      <p:nvGrpSpPr>
+        <p:cNvPr id="1" name=""/>
+        <p:cNvGrpSpPr/>
+        <p:nvPr/>
+      </p:nvGrpSpPr>
+      <p:grpSpPr>
+        <a:xfrm>
+          <a:off x="0" y="0"/>
+          <a:ext cx="0" cy="0"/>
+          <a:chOff x="0" y="0"/>
+          <a:chExt cx="0" cy="0"/>
+        </a:xfrm>
+      </p:grpSpPr>
+      <p:sp>
+        <p:nvSpPr>
+          <p:cNvPr id="2" name="Slide Image Placeholder 1"/>
+          <p:cNvSpPr>
+            <a:spLocks noGrp="1" noRot="1" noChangeAspect="1"/>
+          </p:cNvSpPr>
+          <p:nvPr>
+            <p:ph type="sldImg"/>
+          </p:nvPr>
+        </p:nvSpPr>
+        <p:spPr/>
+      </p:sp>
+      <p:sp>
+        <p:nvSpPr>
+          <p:cNvPr id="3" name="Notes Placeholder 2"/>
+          <p:cNvSpPr>
+            <a:spLocks noGrp="1"/>
+          </p:cNvSpPr>
+          <p:nvPr>
+            <p:ph type="body" idx="1"/>
+          </p:nvPr>
+        </p:nvSpPr>
+        <p:spPr/>
+        <p:txBody>
+          <a:bodyPr/>
+          <a:lstStyle/>
+          <a:p>
+            <a:r>
+              <a:rPr lang="en-US" dirty="0"/>
+              <a:t/>
+            </a:r>
+            <a:endParaRPr lang="en-US" dirty="0"/>
+          </a:p>
+        </p:txBody>
+      </p:sp>
+      <p:sp>
+        <p:nvSpPr>
+          <p:cNvPr id="4" name="Slide Number Placeholder 3"/>
+          <p:cNvSpPr>
+            <a:spLocks noGrp="1"/>
+          </p:cNvSpPr>
+          <p:nvPr>
+            <p:ph type="sldNum" sz="quarter" idx="10"/>
+          </p:nvPr>
+        </p:nvSpPr>
+        <p:spPr/>
+        <p:txBody>
+          <a:bodyPr/>
+          <a:lstStyle/>
+          <a:p>
+            <a:fld id="{F7021451-1387-4CA6-816F-3879F97B5CBC}" type="slidenum">
+              <a:rPr lang="en-US"/>
+              <a:t>13</a:t>
             </a:fld>
             <a:endParaRPr lang="en-US"/>
           </a:p>
@@ -2057,102 +2235,6 @@
         </p:nvSpPr>
         <p:spPr>
           <a:xfrm>
-            <a:off x="406301" y="1223963"/>
-            <a:ext cx="8498026" cy="274290"/>
-          </a:xfrm>
-          <a:prstGeom prst="rect">
-            <a:avLst/>
-          </a:prstGeom>
-          <a:noFill/>
-          <a:ln/>
-        </p:spPr>
-        <p:txBody>
-          <a:bodyPr wrap="square" lIns="0" tIns="0" rIns="0" bIns="0" rtlCol="0" anchor="t"/>
-          <a:lstStyle/>
-          <a:p>
-            <a:pPr algn="l" indent="0" marL="0">
-              <a:lnSpc>
-                <a:spcPts val="2160"/>
-              </a:lnSpc>
-              <a:spcBef>
-                <a:spcPts val="600"/>
-              </a:spcBef>
-              <a:spcAft>
-                <a:spcPts val="800"/>
-              </a:spcAft>
-              <a:buNone/>
-            </a:pPr>
-            <a:r>
-              <a:rPr lang="en-US" sz="1800" b="1" dirty="0">
-                <a:solidFill>
-                  <a:srgbClr val="FE4447"/>
-                </a:solidFill>
-                <a:latin typeface="Georgia" pitchFamily="34" charset="0"/>
-                <a:ea typeface="Georgia" pitchFamily="34" charset="-122"/>
-                <a:cs typeface="Georgia" pitchFamily="34" charset="-120"/>
-              </a:rPr>
-              <a:t>Learning objective</a:t>
-            </a:r>
-            <a:endParaRPr lang="en-US" sz="1800" dirty="0"/>
-          </a:p>
-        </p:txBody>
-      </p:sp>
-      <p:sp>
-        <p:nvSpPr>
-          <p:cNvPr id="6" name="Text 4"/>
-          <p:cNvSpPr/>
-          <p:nvPr/>
-        </p:nvSpPr>
-        <p:spPr>
-          <a:xfrm>
-            <a:off x="406301" y="1637854"/>
-            <a:ext cx="8498026" cy="426541"/>
-          </a:xfrm>
-          <a:prstGeom prst="rect">
-            <a:avLst/>
-          </a:prstGeom>
-          <a:noFill/>
-          <a:ln/>
-        </p:spPr>
-        <p:txBody>
-          <a:bodyPr wrap="square" lIns="0" tIns="0" rIns="0" bIns="0" rtlCol="0" anchor="t"/>
-          <a:lstStyle/>
-          <a:p>
-            <a:pPr algn="l" indent="0" marL="0">
-              <a:lnSpc>
-                <a:spcPts val="1680"/>
-              </a:lnSpc>
-              <a:spcBef>
-                <a:spcPts val="300"/>
-              </a:spcBef>
-              <a:spcAft>
-                <a:spcPts val="300"/>
-              </a:spcAft>
-              <a:buNone/>
-            </a:pPr>
-            <a:r>
-              <a:rPr lang="en-US" sz="1200" dirty="0">
-                <a:solidFill>
-                  <a:srgbClr val="1C2833"/>
-                </a:solidFill>
-                <a:latin typeface="Arial" pitchFamily="34" charset="0"/>
-                <a:ea typeface="Arial" pitchFamily="34" charset="-122"/>
-                <a:cs typeface="Arial" pitchFamily="34" charset="-120"/>
-              </a:rPr>
-              <a:t>By the end of this lesson, students will (a) complete the summative quiz, and (b) present their original magic-square project to the class.</a:t>
-            </a:r>
-            <a:endParaRPr lang="en-US" sz="1200" dirty="0"/>
-          </a:p>
-        </p:txBody>
-      </p:sp>
-      <p:sp>
-        <p:nvSpPr>
-          <p:cNvPr id="7" name="Text 5"/>
-          <p:cNvSpPr/>
-          <p:nvPr/>
-        </p:nvSpPr>
-        <p:spPr>
-          <a:xfrm>
             <a:off x="406301" y="4434929"/>
             <a:ext cx="8498026" cy="213271"/>
           </a:xfrm>
@@ -2297,7 +2379,7 @@
                 <a:ea typeface="Georgia" pitchFamily="34" charset="-122"/>
                 <a:cs typeface="Georgia" pitchFamily="34" charset="-120"/>
               </a:rPr>
-              <a:t>Teacher notes</a:t>
+              <a:t>Homework — none</a:t>
             </a:r>
             <a:endParaRPr lang="en-US" sz="1800" dirty="0"/>
           </a:p>
@@ -2312,7 +2394,7 @@
         <p:spPr>
           <a:xfrm>
             <a:off x="406301" y="870942"/>
-            <a:ext cx="8498026" cy="862608"/>
+            <a:ext cx="8498026" cy="426541"/>
           </a:xfrm>
           <a:prstGeom prst="rect">
             <a:avLst/>
@@ -2345,99 +2427,7 @@
                 <a:ea typeface="Arial" pitchFamily="34" charset="-122"/>
                 <a:cs typeface="Arial" pitchFamily="34" charset="-120"/>
               </a:rPr>
-              <a:t>– Keep the presentations tight. 2 minutes is short on purpose — encourages preparation. – The Q&amp;A minute is for </a:t>
-            </a:r>
-            <a:pPr algn="l" indent="0" marL="0">
-              <a:lnSpc>
-                <a:spcPts val="1680"/>
-              </a:lnSpc>
-              <a:spcBef>
-                <a:spcPts val="300"/>
-              </a:spcBef>
-              <a:spcAft>
-                <a:spcPts val="300"/>
-              </a:spcAft>
-              <a:buNone/>
-            </a:pPr>
-            <a:r>
-              <a:rPr lang="en-US" sz="1200" i="1" dirty="0">
-                <a:solidFill>
-                  <a:srgbClr val="1C2833"/>
-                </a:solidFill>
-                <a:latin typeface="Arial" pitchFamily="34" charset="0"/>
-                <a:ea typeface="Arial" pitchFamily="34" charset="-122"/>
-                <a:cs typeface="Arial" pitchFamily="34" charset="-120"/>
-              </a:rPr>
-              <a:t>one</a:t>
-            </a:r>
-            <a:pPr algn="l" indent="0" marL="0">
-              <a:lnSpc>
-                <a:spcPts val="1680"/>
-              </a:lnSpc>
-              <a:spcBef>
-                <a:spcPts val="300"/>
-              </a:spcBef>
-              <a:spcAft>
-                <a:spcPts val="300"/>
-              </a:spcAft>
-              <a:buNone/>
-            </a:pPr>
-            <a:r>
-              <a:rPr lang="en-US" sz="1200" dirty="0">
-                <a:solidFill>
-                  <a:srgbClr val="1C2833"/>
-                </a:solidFill>
-                <a:latin typeface="Arial" pitchFamily="34" charset="0"/>
-                <a:ea typeface="Arial" pitchFamily="34" charset="-122"/>
-                <a:cs typeface="Arial" pitchFamily="34" charset="-120"/>
-              </a:rPr>
-              <a:t> clarifying question, not a defence. Cap it strictly. – Score against </a:t>
-            </a:r>
-            <a:pPr algn="l" indent="0" marL="0">
-              <a:lnSpc>
-                <a:spcPts val="1680"/>
-              </a:lnSpc>
-              <a:spcBef>
-                <a:spcPts val="300"/>
-              </a:spcBef>
-              <a:spcAft>
-                <a:spcPts val="300"/>
-              </a:spcAft>
-              <a:buNone/>
-            </a:pPr>
-            <a:r>
-              <a:rPr lang="en-US" sz="1200" dirty="0">
-                <a:solidFill>
-                  <a:srgbClr val="1C2833"/>
-                </a:solidFill>
-                <a:latin typeface="Arial" pitchFamily="34" charset="0"/>
-                <a:ea typeface="Arial" pitchFamily="34" charset="-122"/>
-                <a:cs typeface="Arial" pitchFamily="34" charset="-120"/>
-              </a:rPr>
-              <a:t>assessments/rubric.md</a:t>
-            </a:r>
-            <a:pPr algn="l" indent="0" marL="0">
-              <a:lnSpc>
-                <a:spcPts val="1680"/>
-              </a:lnSpc>
-              <a:spcBef>
-                <a:spcPts val="300"/>
-              </a:spcBef>
-              <a:spcAft>
-                <a:spcPts val="300"/>
-              </a:spcAft>
-              <a:buNone/>
-            </a:pPr>
-            <a:r>
-              <a:rPr lang="en-US" sz="1200" dirty="0">
-                <a:solidFill>
-                  <a:srgbClr val="1C2833"/>
-                </a:solidFill>
-                <a:latin typeface="Arial" pitchFamily="34" charset="0"/>
-                <a:ea typeface="Arial" pitchFamily="34" charset="-122"/>
-                <a:cs typeface="Arial" pitchFamily="34" charset="-120"/>
-              </a:rPr>
-              <a:t> during the share — don't try to score after. Live scoring keeps things fast. – For students who freeze: have a partner take over. The presentation is paired; both partners speak counts towards the rubric.</a:t>
+              <a:t>The module ends here. The project artefact stays with the school until the end of term as part of the module's portfolio. Reflection slips are collected.</a:t>
             </a:r>
             <a:endParaRPr lang="en-US" sz="1200" dirty="0"/>
           </a:p>
@@ -2595,7 +2585,7 @@
                 <a:ea typeface="Georgia" pitchFamily="34" charset="-122"/>
                 <a:cs typeface="Georgia" pitchFamily="34" charset="-120"/>
               </a:rPr>
-              <a:t>Citation(s) used in this lesson</a:t>
+              <a:t>Differentiation</a:t>
             </a:r>
             <a:endParaRPr lang="en-US" sz="1800" dirty="0"/>
           </a:p>
@@ -2609,8 +2599,8 @@
         </p:nvSpPr>
         <p:spPr>
           <a:xfrm>
-            <a:off x="406301" y="870942"/>
-            <a:ext cx="8498026" cy="213271"/>
+            <a:off x="634901" y="883593"/>
+            <a:ext cx="8102798" cy="937022"/>
           </a:xfrm>
           <a:prstGeom prst="rect">
             <a:avLst/>
@@ -2622,6 +2612,116 @@
           <a:bodyPr wrap="square" lIns="0" tIns="0" rIns="0" bIns="0" rtlCol="0" anchor="t"/>
           <a:lstStyle/>
           <a:p>
+            <a:pPr algn="l" marL="342900" indent="-342900">
+              <a:lnSpc>
+                <a:spcPts val="1620"/>
+              </a:lnSpc>
+              <a:spcAft>
+                <a:spcPts val="300"/>
+              </a:spcAft>
+              <a:buSzPct val="100000"/>
+              <a:buChar char="•"/>
+            </a:pPr>
+            <a:r>
+              <a:rPr lang="en-US" sz="1200" b="1" dirty="0">
+                <a:solidFill>
+                  <a:srgbClr val="1C2833"/>
+                </a:solidFill>
+                <a:latin typeface="Arial" pitchFamily="34" charset="0"/>
+                <a:ea typeface="Arial" pitchFamily="34" charset="-122"/>
+                <a:cs typeface="Arial" pitchFamily="34" charset="-120"/>
+              </a:rPr>
+              <a:t>One tier up:</a:t>
+            </a:r>
+            <a:pPr algn="l" indent="0" marL="0">
+              <a:lnSpc>
+                <a:spcPts val="1620"/>
+              </a:lnSpc>
+              <a:spcAft>
+                <a:spcPts val="300"/>
+              </a:spcAft>
+              <a:buNone/>
+            </a:pPr>
+            <a:r>
+              <a:rPr lang="en-US" sz="1200" dirty="0">
+                <a:solidFill>
+                  <a:srgbClr val="1C2833"/>
+                </a:solidFill>
+                <a:latin typeface="Arial" pitchFamily="34" charset="0"/>
+                <a:ea typeface="Arial" pitchFamily="34" charset="-122"/>
+                <a:cs typeface="Arial" pitchFamily="34" charset="-120"/>
+              </a:rPr>
+              <a:t> Pairs who finish early help check others' projects against the rubric (specifically, the "method demonstrated correctly" criterion).</a:t>
+            </a:r>
+            <a:endParaRPr lang="en-US" sz="1200" dirty="0"/>
+          </a:p>
+          <a:p>
+            <a:pPr algn="l" marL="342900" indent="-342900">
+              <a:lnSpc>
+                <a:spcPts val="1620"/>
+              </a:lnSpc>
+              <a:spcAft>
+                <a:spcPts val="300"/>
+              </a:spcAft>
+              <a:buSzPct val="100000"/>
+              <a:buChar char="•"/>
+            </a:pPr>
+            <a:r>
+              <a:rPr lang="en-US" sz="1200" b="1" dirty="0">
+                <a:solidFill>
+                  <a:srgbClr val="1C2833"/>
+                </a:solidFill>
+                <a:latin typeface="Arial" pitchFamily="34" charset="0"/>
+                <a:ea typeface="Arial" pitchFamily="34" charset="-122"/>
+                <a:cs typeface="Arial" pitchFamily="34" charset="-120"/>
+              </a:rPr>
+              <a:t>One tier down:</a:t>
+            </a:r>
+            <a:pPr algn="l" indent="0" marL="0">
+              <a:lnSpc>
+                <a:spcPts val="1620"/>
+              </a:lnSpc>
+              <a:spcAft>
+                <a:spcPts val="300"/>
+              </a:spcAft>
+              <a:buNone/>
+            </a:pPr>
+            <a:r>
+              <a:rPr lang="en-US" sz="1200" dirty="0">
+                <a:solidFill>
+                  <a:srgbClr val="1C2833"/>
+                </a:solidFill>
+                <a:latin typeface="Arial" pitchFamily="34" charset="0"/>
+                <a:ea typeface="Arial" pitchFamily="34" charset="-122"/>
+                <a:cs typeface="Arial" pitchFamily="34" charset="-120"/>
+              </a:rPr>
+              <a:t> A pair that didn't quite finish presents a smaller artefact (e.g. 3×3 instead of 5×5). They still meet the citation and verification requirements.</a:t>
+            </a:r>
+            <a:endParaRPr lang="en-US" sz="1200" dirty="0"/>
+          </a:p>
+        </p:txBody>
+      </p:sp>
+      <p:sp>
+        <p:nvSpPr>
+          <p:cNvPr id="5" name="Text 3"/>
+          <p:cNvSpPr/>
+          <p:nvPr/>
+        </p:nvSpPr>
+        <p:spPr>
+          <a:xfrm>
+            <a:off x="406301" y="4434929"/>
+            <a:ext cx="8498026" cy="213271"/>
+          </a:xfrm>
+          <a:prstGeom prst="rect">
+            <a:avLst/>
+          </a:prstGeom>
+          <a:noFill/>
+          <a:ln/>
+        </p:spPr>
+        <p:txBody>
+          <a:bodyPr wrap="square" lIns="0" tIns="0" rIns="0" bIns="0" rtlCol="0" anchor="t"/>
+          <a:lstStyle/>
+          <a:p>
             <a:pPr algn="l" indent="0" marL="0">
               <a:lnSpc>
                 <a:spcPts val="1680"/>
@@ -2643,8 +2743,341 @@
                 <a:ea typeface="Arial" pitchFamily="34" charset="-122"/>
                 <a:cs typeface="Arial" pitchFamily="34" charset="-120"/>
               </a:rPr>
-              <a:t>– Nārāyaṇa Paṇḍita, </a:t>
-            </a:r>
+              <a:t>Middle ·  · IKS Curriculum</a:t>
+            </a:r>
+            <a:endParaRPr lang="en-US" sz="1200" dirty="0"/>
+          </a:p>
+        </p:txBody>
+      </p:sp>
+    </p:spTree>
+  </p:cSld>
+  <p:clrMapOvr>
+    <a:masterClrMapping/>
+  </p:clrMapOvr>
+</p:sld>
+</file>
+
+<file path=ppt/slides/slide12.xml><?xml version="1.0" encoding="utf-8"?>
+<p:sld xmlns:a="http://schemas.openxmlformats.org/drawingml/2006/main" xmlns:r="http://schemas.openxmlformats.org/officeDocument/2006/relationships" xmlns:p="http://schemas.openxmlformats.org/presentationml/2006/main">
+  <p:cSld name="Slide 12">
+    <p:bg>
+      <p:bgPr>
+        <a:solidFill>
+          <a:srgbClr val="FFFFFF"/>
+        </a:solidFill>
+      </p:bgPr>
+    </p:bg>
+    <p:spTree>
+      <p:nvGrpSpPr>
+        <p:cNvPr id="1" name=""/>
+        <p:cNvGrpSpPr/>
+        <p:nvPr/>
+      </p:nvGrpSpPr>
+      <p:grpSpPr>
+        <a:xfrm>
+          <a:off x="0" y="0"/>
+          <a:ext cx="0" cy="0"/>
+          <a:chOff x="0" y="0"/>
+          <a:chExt cx="0" cy="0"/>
+        </a:xfrm>
+      </p:grpSpPr>
+      <p:sp>
+        <p:nvSpPr>
+          <p:cNvPr id="2" name="Text 0"/>
+          <p:cNvSpPr/>
+          <p:nvPr/>
+        </p:nvSpPr>
+        <p:spPr>
+          <a:xfrm>
+            <a:off x="0" y="0"/>
+            <a:ext cx="9144000" cy="101501"/>
+          </a:xfrm>
+          <a:prstGeom prst="rect">
+            <a:avLst/>
+          </a:prstGeom>
+          <a:solidFill>
+            <a:srgbClr val="277884"/>
+          </a:solidFill>
+          <a:ln/>
+        </p:spPr>
+        <p:txBody>
+          <a:bodyPr wrap="square" rtlCol="0" anchor="ctr"/>
+          <a:lstStyle/>
+          <a:p>
+            <a:pPr indent="0" marL="0">
+              <a:buNone/>
+            </a:pPr>
+            <a:endParaRPr lang="en-US" dirty="0"/>
+          </a:p>
+        </p:txBody>
+      </p:sp>
+      <p:sp>
+        <p:nvSpPr>
+          <p:cNvPr id="3" name="Text 1"/>
+          <p:cNvSpPr/>
+          <p:nvPr/>
+        </p:nvSpPr>
+        <p:spPr>
+          <a:xfrm>
+            <a:off x="406301" y="457051"/>
+            <a:ext cx="8498026" cy="274290"/>
+          </a:xfrm>
+          <a:prstGeom prst="rect">
+            <a:avLst/>
+          </a:prstGeom>
+          <a:noFill/>
+          <a:ln/>
+        </p:spPr>
+        <p:txBody>
+          <a:bodyPr wrap="square" lIns="0" tIns="0" rIns="0" bIns="0" rtlCol="0" anchor="t"/>
+          <a:lstStyle/>
+          <a:p>
+            <a:pPr algn="l" indent="0" marL="0">
+              <a:lnSpc>
+                <a:spcPts val="2160"/>
+              </a:lnSpc>
+              <a:spcBef>
+                <a:spcPts val="600"/>
+              </a:spcBef>
+              <a:spcAft>
+                <a:spcPts val="800"/>
+              </a:spcAft>
+              <a:buNone/>
+            </a:pPr>
+            <a:r>
+              <a:rPr lang="en-US" sz="1800" b="1" dirty="0">
+                <a:solidFill>
+                  <a:srgbClr val="FE4447"/>
+                </a:solidFill>
+                <a:latin typeface="Georgia" pitchFamily="34" charset="0"/>
+                <a:ea typeface="Georgia" pitchFamily="34" charset="-122"/>
+                <a:cs typeface="Georgia" pitchFamily="34" charset="-120"/>
+              </a:rPr>
+              <a:t>Teacher notes</a:t>
+            </a:r>
+            <a:endParaRPr lang="en-US" sz="1800" dirty="0"/>
+          </a:p>
+        </p:txBody>
+      </p:sp>
+      <p:sp>
+        <p:nvSpPr>
+          <p:cNvPr id="4" name="Text 2"/>
+          <p:cNvSpPr/>
+          <p:nvPr/>
+        </p:nvSpPr>
+        <p:spPr>
+          <a:xfrm>
+            <a:off x="634901" y="883593"/>
+            <a:ext cx="8102798" cy="1237952"/>
+          </a:xfrm>
+          <a:prstGeom prst="rect">
+            <a:avLst/>
+          </a:prstGeom>
+          <a:noFill/>
+          <a:ln/>
+        </p:spPr>
+        <p:txBody>
+          <a:bodyPr wrap="square" lIns="0" tIns="0" rIns="0" bIns="0" rtlCol="0" anchor="t"/>
+          <a:lstStyle/>
+          <a:p>
+            <a:pPr algn="l" marL="342900" indent="-342900">
+              <a:lnSpc>
+                <a:spcPts val="1620"/>
+              </a:lnSpc>
+              <a:spcAft>
+                <a:spcPts val="300"/>
+              </a:spcAft>
+              <a:buSzPct val="100000"/>
+              <a:buChar char="•"/>
+            </a:pPr>
+            <a:r>
+              <a:rPr lang="en-US" sz="1200" dirty="0">
+                <a:solidFill>
+                  <a:srgbClr val="1C2833"/>
+                </a:solidFill>
+                <a:latin typeface="Arial" pitchFamily="34" charset="0"/>
+                <a:ea typeface="Arial" pitchFamily="34" charset="-122"/>
+                <a:cs typeface="Arial" pitchFamily="34" charset="-120"/>
+              </a:rPr>
+              <a:t>Keep the presentations tight. 2 minutes is short on purpose — encourages preparation.</a:t>
+            </a:r>
+            <a:endParaRPr lang="en-US" sz="1200" dirty="0"/>
+          </a:p>
+          <a:p>
+            <a:pPr algn="l" marL="342900" indent="-342900">
+              <a:lnSpc>
+                <a:spcPts val="1620"/>
+              </a:lnSpc>
+              <a:spcAft>
+                <a:spcPts val="300"/>
+              </a:spcAft>
+              <a:buSzPct val="100000"/>
+              <a:buChar char="•"/>
+            </a:pPr>
+            <a:r>
+              <a:rPr lang="en-US" sz="1200" dirty="0">
+                <a:solidFill>
+                  <a:srgbClr val="1C2833"/>
+                </a:solidFill>
+                <a:latin typeface="Arial" pitchFamily="34" charset="0"/>
+                <a:ea typeface="Arial" pitchFamily="34" charset="-122"/>
+                <a:cs typeface="Arial" pitchFamily="34" charset="-120"/>
+              </a:rPr>
+              <a:t>The Q&amp;A minute is for </a:t>
+            </a:r>
+            <a:pPr algn="l" indent="0" marL="0">
+              <a:lnSpc>
+                <a:spcPts val="1620"/>
+              </a:lnSpc>
+              <a:spcAft>
+                <a:spcPts val="300"/>
+              </a:spcAft>
+              <a:buNone/>
+            </a:pPr>
+            <a:r>
+              <a:rPr lang="en-US" sz="1200" i="1" dirty="0">
+                <a:solidFill>
+                  <a:srgbClr val="1C2833"/>
+                </a:solidFill>
+                <a:latin typeface="Arial" pitchFamily="34" charset="0"/>
+                <a:ea typeface="Arial" pitchFamily="34" charset="-122"/>
+                <a:cs typeface="Arial" pitchFamily="34" charset="-120"/>
+              </a:rPr>
+              <a:t>one</a:t>
+            </a:r>
+            <a:pPr algn="l" indent="0" marL="0">
+              <a:lnSpc>
+                <a:spcPts val="1620"/>
+              </a:lnSpc>
+              <a:spcAft>
+                <a:spcPts val="300"/>
+              </a:spcAft>
+              <a:buNone/>
+            </a:pPr>
+            <a:r>
+              <a:rPr lang="en-US" sz="1200" dirty="0">
+                <a:solidFill>
+                  <a:srgbClr val="1C2833"/>
+                </a:solidFill>
+                <a:latin typeface="Arial" pitchFamily="34" charset="0"/>
+                <a:ea typeface="Arial" pitchFamily="34" charset="-122"/>
+                <a:cs typeface="Arial" pitchFamily="34" charset="-120"/>
+              </a:rPr>
+              <a:t> clarifying question, not a defence. Cap it strictly.</a:t>
+            </a:r>
+            <a:endParaRPr lang="en-US" sz="1200" dirty="0"/>
+          </a:p>
+          <a:p>
+            <a:pPr algn="l" marL="342900" indent="-342900">
+              <a:lnSpc>
+                <a:spcPts val="1620"/>
+              </a:lnSpc>
+              <a:spcAft>
+                <a:spcPts val="300"/>
+              </a:spcAft>
+              <a:buSzPct val="100000"/>
+              <a:buChar char="•"/>
+            </a:pPr>
+            <a:r>
+              <a:rPr lang="en-US" sz="1200" dirty="0">
+                <a:solidFill>
+                  <a:srgbClr val="1C2833"/>
+                </a:solidFill>
+                <a:latin typeface="Arial" pitchFamily="34" charset="0"/>
+                <a:ea typeface="Arial" pitchFamily="34" charset="-122"/>
+                <a:cs typeface="Arial" pitchFamily="34" charset="-120"/>
+              </a:rPr>
+              <a:t>Score against </a:t>
+            </a:r>
+            <a:pPr algn="l" indent="0" marL="0">
+              <a:lnSpc>
+                <a:spcPts val="1620"/>
+              </a:lnSpc>
+              <a:spcAft>
+                <a:spcPts val="300"/>
+              </a:spcAft>
+              <a:buNone/>
+            </a:pPr>
+            <a:r>
+              <a:rPr lang="en-US" sz="1200" dirty="0">
+                <a:solidFill>
+                  <a:srgbClr val="1C2833"/>
+                </a:solidFill>
+                <a:latin typeface="Arial" pitchFamily="34" charset="0"/>
+                <a:ea typeface="Arial" pitchFamily="34" charset="-122"/>
+                <a:cs typeface="Arial" pitchFamily="34" charset="-120"/>
+              </a:rPr>
+              <a:t>assessments/rubric.md</a:t>
+            </a:r>
+            <a:pPr algn="l" indent="0" marL="0">
+              <a:lnSpc>
+                <a:spcPts val="1620"/>
+              </a:lnSpc>
+              <a:spcAft>
+                <a:spcPts val="300"/>
+              </a:spcAft>
+              <a:buNone/>
+            </a:pPr>
+            <a:r>
+              <a:rPr lang="en-US" sz="1200" dirty="0">
+                <a:solidFill>
+                  <a:srgbClr val="1C2833"/>
+                </a:solidFill>
+                <a:latin typeface="Arial" pitchFamily="34" charset="0"/>
+                <a:ea typeface="Arial" pitchFamily="34" charset="-122"/>
+                <a:cs typeface="Arial" pitchFamily="34" charset="-120"/>
+              </a:rPr>
+              <a:t> during the share — don't try to score after. Live scoring keeps things fast.</a:t>
+            </a:r>
+            <a:endParaRPr lang="en-US" sz="1200" dirty="0"/>
+          </a:p>
+          <a:p>
+            <a:pPr algn="l" marL="342900" indent="-342900">
+              <a:lnSpc>
+                <a:spcPts val="1620"/>
+              </a:lnSpc>
+              <a:spcAft>
+                <a:spcPts val="300"/>
+              </a:spcAft>
+              <a:buSzPct val="100000"/>
+              <a:buChar char="•"/>
+            </a:pPr>
+            <a:r>
+              <a:rPr lang="en-US" sz="1200" dirty="0">
+                <a:solidFill>
+                  <a:srgbClr val="1C2833"/>
+                </a:solidFill>
+                <a:latin typeface="Arial" pitchFamily="34" charset="0"/>
+                <a:ea typeface="Arial" pitchFamily="34" charset="-122"/>
+                <a:cs typeface="Arial" pitchFamily="34" charset="-120"/>
+              </a:rPr>
+              <a:t>For students who freeze: have a partner take over. The presentation is paired; both partners speak counts towards the rubric.</a:t>
+            </a:r>
+            <a:endParaRPr lang="en-US" sz="1200" dirty="0"/>
+          </a:p>
+        </p:txBody>
+      </p:sp>
+      <p:sp>
+        <p:nvSpPr>
+          <p:cNvPr id="5" name="Text 3"/>
+          <p:cNvSpPr/>
+          <p:nvPr/>
+        </p:nvSpPr>
+        <p:spPr>
+          <a:xfrm>
+            <a:off x="406301" y="4434929"/>
+            <a:ext cx="8498026" cy="213271"/>
+          </a:xfrm>
+          <a:prstGeom prst="rect">
+            <a:avLst/>
+          </a:prstGeom>
+          <a:noFill/>
+          <a:ln/>
+        </p:spPr>
+        <p:txBody>
+          <a:bodyPr wrap="square" lIns="0" tIns="0" rIns="0" bIns="0" rtlCol="0" anchor="t"/>
+          <a:lstStyle/>
+          <a:p>
             <a:pPr algn="l" indent="0" marL="0">
               <a:lnSpc>
                 <a:spcPts val="1680"/>
@@ -2658,6 +3091,182 @@
               <a:buNone/>
             </a:pPr>
             <a:r>
+              <a:rPr lang="en-US" sz="1200" dirty="0">
+                <a:solidFill>
+                  <a:srgbClr val="1C2833"/>
+                </a:solidFill>
+                <a:latin typeface="Arial" pitchFamily="34" charset="0"/>
+                <a:ea typeface="Arial" pitchFamily="34" charset="-122"/>
+                <a:cs typeface="Arial" pitchFamily="34" charset="-120"/>
+              </a:rPr>
+              <a:t>Middle ·  · IKS Curriculum</a:t>
+            </a:r>
+            <a:endParaRPr lang="en-US" sz="1200" dirty="0"/>
+          </a:p>
+        </p:txBody>
+      </p:sp>
+    </p:spTree>
+  </p:cSld>
+  <p:clrMapOvr>
+    <a:masterClrMapping/>
+  </p:clrMapOvr>
+</p:sld>
+</file>
+
+<file path=ppt/slides/slide13.xml><?xml version="1.0" encoding="utf-8"?>
+<p:sld xmlns:a="http://schemas.openxmlformats.org/drawingml/2006/main" xmlns:r="http://schemas.openxmlformats.org/officeDocument/2006/relationships" xmlns:p="http://schemas.openxmlformats.org/presentationml/2006/main">
+  <p:cSld name="Slide 13">
+    <p:bg>
+      <p:bgPr>
+        <a:solidFill>
+          <a:srgbClr val="FFFFFF"/>
+        </a:solidFill>
+      </p:bgPr>
+    </p:bg>
+    <p:spTree>
+      <p:nvGrpSpPr>
+        <p:cNvPr id="1" name=""/>
+        <p:cNvGrpSpPr/>
+        <p:nvPr/>
+      </p:nvGrpSpPr>
+      <p:grpSpPr>
+        <a:xfrm>
+          <a:off x="0" y="0"/>
+          <a:ext cx="0" cy="0"/>
+          <a:chOff x="0" y="0"/>
+          <a:chExt cx="0" cy="0"/>
+        </a:xfrm>
+      </p:grpSpPr>
+      <p:sp>
+        <p:nvSpPr>
+          <p:cNvPr id="2" name="Text 0"/>
+          <p:cNvSpPr/>
+          <p:nvPr/>
+        </p:nvSpPr>
+        <p:spPr>
+          <a:xfrm>
+            <a:off x="0" y="0"/>
+            <a:ext cx="9144000" cy="101501"/>
+          </a:xfrm>
+          <a:prstGeom prst="rect">
+            <a:avLst/>
+          </a:prstGeom>
+          <a:solidFill>
+            <a:srgbClr val="277884"/>
+          </a:solidFill>
+          <a:ln/>
+        </p:spPr>
+        <p:txBody>
+          <a:bodyPr wrap="square" rtlCol="0" anchor="ctr"/>
+          <a:lstStyle/>
+          <a:p>
+            <a:pPr indent="0" marL="0">
+              <a:buNone/>
+            </a:pPr>
+            <a:endParaRPr lang="en-US" dirty="0"/>
+          </a:p>
+        </p:txBody>
+      </p:sp>
+      <p:sp>
+        <p:nvSpPr>
+          <p:cNvPr id="3" name="Text 1"/>
+          <p:cNvSpPr/>
+          <p:nvPr/>
+        </p:nvSpPr>
+        <p:spPr>
+          <a:xfrm>
+            <a:off x="406301" y="457051"/>
+            <a:ext cx="8498026" cy="274290"/>
+          </a:xfrm>
+          <a:prstGeom prst="rect">
+            <a:avLst/>
+          </a:prstGeom>
+          <a:noFill/>
+          <a:ln/>
+        </p:spPr>
+        <p:txBody>
+          <a:bodyPr wrap="square" lIns="0" tIns="0" rIns="0" bIns="0" rtlCol="0" anchor="t"/>
+          <a:lstStyle/>
+          <a:p>
+            <a:pPr algn="l" indent="0" marL="0">
+              <a:lnSpc>
+                <a:spcPts val="2160"/>
+              </a:lnSpc>
+              <a:spcBef>
+                <a:spcPts val="600"/>
+              </a:spcBef>
+              <a:spcAft>
+                <a:spcPts val="800"/>
+              </a:spcAft>
+              <a:buNone/>
+            </a:pPr>
+            <a:r>
+              <a:rPr lang="en-US" sz="1800" b="1" dirty="0">
+                <a:solidFill>
+                  <a:srgbClr val="FE4447"/>
+                </a:solidFill>
+                <a:latin typeface="Georgia" pitchFamily="34" charset="0"/>
+                <a:ea typeface="Georgia" pitchFamily="34" charset="-122"/>
+                <a:cs typeface="Georgia" pitchFamily="34" charset="-120"/>
+              </a:rPr>
+              <a:t>Citation(s) used in this lesson</a:t>
+            </a:r>
+            <a:endParaRPr lang="en-US" sz="1800" dirty="0"/>
+          </a:p>
+        </p:txBody>
+      </p:sp>
+      <p:sp>
+        <p:nvSpPr>
+          <p:cNvPr id="4" name="Text 2"/>
+          <p:cNvSpPr/>
+          <p:nvPr/>
+        </p:nvSpPr>
+        <p:spPr>
+          <a:xfrm>
+            <a:off x="634901" y="883593"/>
+            <a:ext cx="8102798" cy="281880"/>
+          </a:xfrm>
+          <a:prstGeom prst="rect">
+            <a:avLst/>
+          </a:prstGeom>
+          <a:noFill/>
+          <a:ln/>
+        </p:spPr>
+        <p:txBody>
+          <a:bodyPr wrap="square" lIns="0" tIns="0" rIns="0" bIns="0" rtlCol="0" anchor="t"/>
+          <a:lstStyle/>
+          <a:p>
+            <a:pPr algn="l" marL="342900" indent="-342900">
+              <a:lnSpc>
+                <a:spcPts val="1620"/>
+              </a:lnSpc>
+              <a:spcAft>
+                <a:spcPts val="300"/>
+              </a:spcAft>
+              <a:buSzPct val="100000"/>
+              <a:buChar char="•"/>
+            </a:pPr>
+            <a:r>
+              <a:rPr lang="en-US" sz="1200" dirty="0">
+                <a:solidFill>
+                  <a:srgbClr val="1C2833"/>
+                </a:solidFill>
+                <a:latin typeface="Arial" pitchFamily="34" charset="0"/>
+                <a:ea typeface="Arial" pitchFamily="34" charset="-122"/>
+                <a:cs typeface="Arial" pitchFamily="34" charset="-120"/>
+              </a:rPr>
+              <a:t>Nārāyaṇa Paṇḍita, </a:t>
+            </a:r>
+            <a:pPr algn="l" indent="0" marL="0">
+              <a:lnSpc>
+                <a:spcPts val="1620"/>
+              </a:lnSpc>
+              <a:spcAft>
+                <a:spcPts val="300"/>
+              </a:spcAft>
+              <a:buNone/>
+            </a:pPr>
+            <a:r>
               <a:rPr lang="en-US" sz="1200" i="1" dirty="0">
                 <a:solidFill>
                   <a:srgbClr val="1C2833"/>
@@ -2670,11 +3279,8 @@
             </a:r>
             <a:pPr algn="l" indent="0" marL="0">
               <a:lnSpc>
-                <a:spcPts val="1680"/>
-              </a:lnSpc>
-              <a:spcBef>
-                <a:spcPts val="300"/>
-              </a:spcBef>
+                <a:spcPts val="1620"/>
+              </a:lnSpc>
               <a:spcAft>
                 <a:spcPts val="300"/>
               </a:spcAft>
@@ -2693,11 +3299,8 @@
             </a:r>
             <a:pPr algn="l" indent="0" marL="0">
               <a:lnSpc>
-                <a:spcPts val="1680"/>
-              </a:lnSpc>
-              <a:spcBef>
-                <a:spcPts val="300"/>
-              </a:spcBef>
+                <a:spcPts val="1620"/>
+              </a:lnSpc>
               <a:spcAft>
                 <a:spcPts val="300"/>
               </a:spcAft>
@@ -2716,11 +3319,8 @@
             </a:r>
             <a:pPr algn="l" indent="0" marL="0">
               <a:lnSpc>
-                <a:spcPts val="1680"/>
-              </a:lnSpc>
-              <a:spcBef>
-                <a:spcPts val="300"/>
-              </a:spcBef>
+                <a:spcPts val="1620"/>
+              </a:lnSpc>
               <a:spcAft>
                 <a:spcPts val="300"/>
               </a:spcAft>
@@ -2893,7 +3493,7 @@
                 <a:ea typeface="Georgia" pitchFamily="34" charset="-122"/>
                 <a:cs typeface="Georgia" pitchFamily="34" charset="-120"/>
               </a:rPr>
-              <a:t>Materials</a:t>
+              <a:t>Learning objective</a:t>
             </a:r>
             <a:endParaRPr lang="en-US" sz="1800" dirty="0"/>
           </a:p>
@@ -2908,7 +3508,7 @@
         <p:spPr>
           <a:xfrm>
             <a:off x="406301" y="870942"/>
-            <a:ext cx="8498026" cy="436066"/>
+            <a:ext cx="8498026" cy="426541"/>
           </a:xfrm>
           <a:prstGeom prst="rect">
             <a:avLst/>
@@ -2941,53 +3541,7 @@
                 <a:ea typeface="Arial" pitchFamily="34" charset="-122"/>
                 <a:cs typeface="Arial" pitchFamily="34" charset="-120"/>
               </a:rPr>
-              <a:t>– Printed summative quiz (one per student) — </a:t>
-            </a:r>
-            <a:pPr algn="l" indent="0" marL="0">
-              <a:lnSpc>
-                <a:spcPts val="1680"/>
-              </a:lnSpc>
-              <a:spcBef>
-                <a:spcPts val="300"/>
-              </a:spcBef>
-              <a:spcAft>
-                <a:spcPts val="300"/>
-              </a:spcAft>
-              <a:buNone/>
-            </a:pPr>
-            <a:r>
-              <a:rPr lang="en-US" sz="1200" dirty="0">
-                <a:solidFill>
-                  <a:srgbClr val="1C2833"/>
-                </a:solidFill>
-                <a:latin typeface="Arial" pitchFamily="34" charset="0"/>
-                <a:ea typeface="Arial" pitchFamily="34" charset="-122"/>
-                <a:cs typeface="Arial" pitchFamily="34" charset="-120"/>
-              </a:rPr>
-              <a:t>quizzes/summative.md</a:t>
-            </a:r>
-            <a:pPr algn="l" indent="0" marL="0">
-              <a:lnSpc>
-                <a:spcPts val="1680"/>
-              </a:lnSpc>
-              <a:spcBef>
-                <a:spcPts val="300"/>
-              </a:spcBef>
-              <a:spcAft>
-                <a:spcPts val="300"/>
-              </a:spcAft>
-              <a:buNone/>
-            </a:pPr>
-            <a:r>
-              <a:rPr lang="en-US" sz="1200" dirty="0">
-                <a:solidFill>
-                  <a:srgbClr val="1C2833"/>
-                </a:solidFill>
-                <a:latin typeface="Arial" pitchFamily="34" charset="0"/>
-                <a:ea typeface="Arial" pitchFamily="34" charset="-122"/>
-                <a:cs typeface="Arial" pitchFamily="34" charset="-120"/>
-              </a:rPr>
-              <a:t> – Project artefacts (posters, devices for videos, written exposition) – Stopwatch (for 2-minute presentation timer)</a:t>
+              <a:t>By the end of this lesson, students will (a) complete the summative quiz, and (b) present their original magic-square project to the class.</a:t>
             </a:r>
             <a:endParaRPr lang="en-US" sz="1200" dirty="0"/>
           </a:p>
@@ -3145,7 +3699,7 @@
                 <a:ea typeface="Georgia" pitchFamily="34" charset="-122"/>
                 <a:cs typeface="Georgia" pitchFamily="34" charset="-120"/>
               </a:rPr>
-              <a:t>Lesson flow</a:t>
+              <a:t>Materials</a:t>
             </a:r>
             <a:endParaRPr lang="en-US" sz="1800" dirty="0"/>
           </a:p>
@@ -3154,6 +3708,120 @@
       <p:sp>
         <p:nvSpPr>
           <p:cNvPr id="4" name="Text 2"/>
+          <p:cNvSpPr/>
+          <p:nvPr/>
+        </p:nvSpPr>
+        <p:spPr>
+          <a:xfrm>
+            <a:off x="634901" y="883593"/>
+            <a:ext cx="8102798" cy="788491"/>
+          </a:xfrm>
+          <a:prstGeom prst="rect">
+            <a:avLst/>
+          </a:prstGeom>
+          <a:noFill/>
+          <a:ln/>
+        </p:spPr>
+        <p:txBody>
+          <a:bodyPr wrap="square" lIns="0" tIns="0" rIns="0" bIns="0" rtlCol="0" anchor="t"/>
+          <a:lstStyle/>
+          <a:p>
+            <a:pPr algn="l" marL="342900" indent="-342900">
+              <a:lnSpc>
+                <a:spcPts val="1620"/>
+              </a:lnSpc>
+              <a:spcAft>
+                <a:spcPts val="300"/>
+              </a:spcAft>
+              <a:buSzPct val="100000"/>
+              <a:buChar char="•"/>
+            </a:pPr>
+            <a:r>
+              <a:rPr lang="en-US" sz="1200" dirty="0">
+                <a:solidFill>
+                  <a:srgbClr val="1C2833"/>
+                </a:solidFill>
+                <a:latin typeface="Arial" pitchFamily="34" charset="0"/>
+                <a:ea typeface="Arial" pitchFamily="34" charset="-122"/>
+                <a:cs typeface="Arial" pitchFamily="34" charset="-120"/>
+              </a:rPr>
+              <a:t>Printed summative quiz (one per student) — </a:t>
+            </a:r>
+            <a:pPr algn="l" indent="0" marL="0">
+              <a:lnSpc>
+                <a:spcPts val="1620"/>
+              </a:lnSpc>
+              <a:spcAft>
+                <a:spcPts val="300"/>
+              </a:spcAft>
+              <a:buNone/>
+            </a:pPr>
+            <a:r>
+              <a:rPr lang="en-US" sz="1200" dirty="0">
+                <a:solidFill>
+                  <a:srgbClr val="1C2833"/>
+                </a:solidFill>
+                <a:latin typeface="Arial" pitchFamily="34" charset="0"/>
+                <a:ea typeface="Arial" pitchFamily="34" charset="-122"/>
+                <a:cs typeface="Arial" pitchFamily="34" charset="-120"/>
+              </a:rPr>
+              <a:t>quizzes/summative.md</a:t>
+            </a:r>
+            <a:endParaRPr lang="en-US" sz="1200" dirty="0"/>
+          </a:p>
+          <a:p>
+            <a:pPr algn="l" marL="342900" indent="-342900">
+              <a:lnSpc>
+                <a:spcPts val="1620"/>
+              </a:lnSpc>
+              <a:spcAft>
+                <a:spcPts val="300"/>
+              </a:spcAft>
+              <a:buSzPct val="100000"/>
+              <a:buChar char="•"/>
+            </a:pPr>
+            <a:r>
+              <a:rPr lang="en-US" sz="1200" dirty="0">
+                <a:solidFill>
+                  <a:srgbClr val="1C2833"/>
+                </a:solidFill>
+                <a:latin typeface="Arial" pitchFamily="34" charset="0"/>
+                <a:ea typeface="Arial" pitchFamily="34" charset="-122"/>
+                <a:cs typeface="Arial" pitchFamily="34" charset="-120"/>
+              </a:rPr>
+              <a:t>Project artefacts (posters, devices for videos, written exposition)</a:t>
+            </a:r>
+            <a:endParaRPr lang="en-US" sz="1200" dirty="0"/>
+          </a:p>
+          <a:p>
+            <a:pPr algn="l" marL="342900" indent="-342900">
+              <a:lnSpc>
+                <a:spcPts val="1620"/>
+              </a:lnSpc>
+              <a:spcAft>
+                <a:spcPts val="300"/>
+              </a:spcAft>
+              <a:buSzPct val="100000"/>
+              <a:buChar char="•"/>
+            </a:pPr>
+            <a:r>
+              <a:rPr lang="en-US" sz="1200" dirty="0">
+                <a:solidFill>
+                  <a:srgbClr val="1C2833"/>
+                </a:solidFill>
+                <a:latin typeface="Arial" pitchFamily="34" charset="0"/>
+                <a:ea typeface="Arial" pitchFamily="34" charset="-122"/>
+                <a:cs typeface="Arial" pitchFamily="34" charset="-120"/>
+              </a:rPr>
+              <a:t>Stopwatch (for 2-minute presentation timer)</a:t>
+            </a:r>
+            <a:endParaRPr lang="en-US" sz="1200" dirty="0"/>
+          </a:p>
+        </p:txBody>
+      </p:sp>
+      <p:sp>
+        <p:nvSpPr>
+          <p:cNvPr id="5" name="Text 3"/>
           <p:cNvSpPr/>
           <p:nvPr/>
         </p:nvSpPr>
@@ -3303,7 +3971,7 @@
                 <a:ea typeface="Georgia" pitchFamily="34" charset="-122"/>
                 <a:cs typeface="Georgia" pitchFamily="34" charset="-120"/>
               </a:rPr>
-              <a:t>Summative quiz (15 min)</a:t>
+              <a:t>Lesson flow</a:t>
             </a:r>
             <a:endParaRPr lang="en-US" sz="1800" dirty="0"/>
           </a:p>
@@ -3312,100 +3980,6 @@
       <p:sp>
         <p:nvSpPr>
           <p:cNvPr id="4" name="Text 2"/>
-          <p:cNvSpPr/>
-          <p:nvPr/>
-        </p:nvSpPr>
-        <p:spPr>
-          <a:xfrm>
-            <a:off x="406301" y="870942"/>
-            <a:ext cx="8498026" cy="436066"/>
-          </a:xfrm>
-          <a:prstGeom prst="rect">
-            <a:avLst/>
-          </a:prstGeom>
-          <a:noFill/>
-          <a:ln/>
-        </p:spPr>
-        <p:txBody>
-          <a:bodyPr wrap="square" lIns="0" tIns="0" rIns="0" bIns="0" rtlCol="0" anchor="t"/>
-          <a:lstStyle/>
-          <a:p>
-            <a:pPr algn="l" indent="0" marL="0">
-              <a:lnSpc>
-                <a:spcPts val="1680"/>
-              </a:lnSpc>
-              <a:spcBef>
-                <a:spcPts val="300"/>
-              </a:spcBef>
-              <a:spcAft>
-                <a:spcPts val="300"/>
-              </a:spcAft>
-              <a:buNone/>
-            </a:pPr>
-            <a:r>
-              <a:rPr lang="en-US" sz="1200" dirty="0">
-                <a:solidFill>
-                  <a:srgbClr val="1C2833"/>
-                </a:solidFill>
-                <a:latin typeface="Arial" pitchFamily="34" charset="0"/>
-                <a:ea typeface="Arial" pitchFamily="34" charset="-122"/>
-                <a:cs typeface="Arial" pitchFamily="34" charset="-120"/>
-              </a:rPr>
-              <a:t>– Closed notebook. Students complete </a:t>
-            </a:r>
-            <a:pPr algn="l" indent="0" marL="0">
-              <a:lnSpc>
-                <a:spcPts val="1680"/>
-              </a:lnSpc>
-              <a:spcBef>
-                <a:spcPts val="300"/>
-              </a:spcBef>
-              <a:spcAft>
-                <a:spcPts val="300"/>
-              </a:spcAft>
-              <a:buNone/>
-            </a:pPr>
-            <a:r>
-              <a:rPr lang="en-US" sz="1200" dirty="0">
-                <a:solidFill>
-                  <a:srgbClr val="1C2833"/>
-                </a:solidFill>
-                <a:latin typeface="Arial" pitchFamily="34" charset="0"/>
-                <a:ea typeface="Arial" pitchFamily="34" charset="-122"/>
-                <a:cs typeface="Arial" pitchFamily="34" charset="-120"/>
-              </a:rPr>
-              <a:t>quizzes/summative.md</a:t>
-            </a:r>
-            <a:pPr algn="l" indent="0" marL="0">
-              <a:lnSpc>
-                <a:spcPts val="1680"/>
-              </a:lnSpc>
-              <a:spcBef>
-                <a:spcPts val="300"/>
-              </a:spcBef>
-              <a:spcAft>
-                <a:spcPts val="300"/>
-              </a:spcAft>
-              <a:buNone/>
-            </a:pPr>
-            <a:r>
-              <a:rPr lang="en-US" sz="1200" dirty="0">
-                <a:solidFill>
-                  <a:srgbClr val="1C2833"/>
-                </a:solidFill>
-                <a:latin typeface="Arial" pitchFamily="34" charset="0"/>
-                <a:ea typeface="Arial" pitchFamily="34" charset="-122"/>
-                <a:cs typeface="Arial" pitchFamily="34" charset="-120"/>
-              </a:rPr>
-              <a:t> individually. – 15 min total: 3 min reading, 12 min solving.</a:t>
-            </a:r>
-            <a:endParaRPr lang="en-US" sz="1200" dirty="0"/>
-          </a:p>
-        </p:txBody>
-      </p:sp>
-      <p:sp>
-        <p:nvSpPr>
-          <p:cNvPr id="5" name="Text 3"/>
           <p:cNvSpPr/>
           <p:nvPr/>
         </p:nvSpPr>
@@ -3555,7 +4129,7 @@
                 <a:ea typeface="Georgia" pitchFamily="34" charset="-122"/>
                 <a:cs typeface="Georgia" pitchFamily="34" charset="-120"/>
               </a:rPr>
-              <a:t>Presentations (25 min)</a:t>
+              <a:t>Summative quiz (15 min)</a:t>
             </a:r>
             <a:endParaRPr lang="en-US" sz="1800" dirty="0"/>
           </a:p>
@@ -3569,8 +4143,8 @@
         </p:nvSpPr>
         <p:spPr>
           <a:xfrm>
-            <a:off x="406301" y="870942"/>
-            <a:ext cx="8498026" cy="426541"/>
+            <a:off x="634901" y="883593"/>
+            <a:ext cx="8102798" cy="544711"/>
           </a:xfrm>
           <a:prstGeom prst="rect">
             <a:avLst/>
@@ -3582,17 +4156,15 @@
           <a:bodyPr wrap="square" lIns="0" tIns="0" rIns="0" bIns="0" rtlCol="0" anchor="t"/>
           <a:lstStyle/>
           <a:p>
-            <a:pPr algn="l" indent="0" marL="0">
-              <a:lnSpc>
-                <a:spcPts val="1680"/>
-              </a:lnSpc>
-              <a:spcBef>
-                <a:spcPts val="300"/>
-              </a:spcBef>
-              <a:spcAft>
-                <a:spcPts val="300"/>
-              </a:spcAft>
-              <a:buNone/>
+            <a:pPr algn="l" marL="342900" indent="-342900">
+              <a:lnSpc>
+                <a:spcPts val="1620"/>
+              </a:lnSpc>
+              <a:spcAft>
+                <a:spcPts val="300"/>
+              </a:spcAft>
+              <a:buSzPct val="100000"/>
+              <a:buChar char="•"/>
             </a:pPr>
             <a:r>
               <a:rPr lang="en-US" sz="1200" dirty="0">
@@ -3603,38 +4175,12 @@
                 <a:ea typeface="Arial" pitchFamily="34" charset="-122"/>
                 <a:cs typeface="Arial" pitchFamily="34" charset="-120"/>
               </a:rPr>
-              <a:t>– Each pair gets </a:t>
-            </a:r>
-            <a:pPr algn="l" indent="0" marL="0">
-              <a:lnSpc>
-                <a:spcPts val="1680"/>
-              </a:lnSpc>
-              <a:spcBef>
-                <a:spcPts val="300"/>
-              </a:spcBef>
-              <a:spcAft>
-                <a:spcPts val="300"/>
-              </a:spcAft>
-              <a:buNone/>
-            </a:pPr>
-            <a:r>
-              <a:rPr lang="en-US" sz="1200" b="1" dirty="0">
-                <a:solidFill>
-                  <a:srgbClr val="1C2833"/>
-                </a:solidFill>
-                <a:latin typeface="Arial" pitchFamily="34" charset="0"/>
-                <a:ea typeface="Arial" pitchFamily="34" charset="-122"/>
-                <a:cs typeface="Arial" pitchFamily="34" charset="-120"/>
-              </a:rPr>
-              <a:t>2 minutes</a:t>
-            </a:r>
-            <a:pPr algn="l" indent="0" marL="0">
-              <a:lnSpc>
-                <a:spcPts val="1680"/>
-              </a:lnSpc>
-              <a:spcBef>
-                <a:spcPts val="300"/>
-              </a:spcBef>
+              <a:t>Closed notebook. Students complete </a:t>
+            </a:r>
+            <a:pPr algn="l" indent="0" marL="0">
+              <a:lnSpc>
+                <a:spcPts val="1620"/>
+              </a:lnSpc>
               <a:spcAft>
                 <a:spcPts val="300"/>
               </a:spcAft>
@@ -3649,203 +4195,59 @@
                 <a:ea typeface="Arial" pitchFamily="34" charset="-122"/>
                 <a:cs typeface="Arial" pitchFamily="34" charset="-120"/>
               </a:rPr>
-              <a:t> to present + 1 minute Q&amp;A. – With ~10–12 pairs in a typical class, this fits in 25 min. – Order: teacher draws pair names randomly.</a:t>
+              <a:t>quizzes/summative.md</a:t>
+            </a:r>
+            <a:pPr algn="l" indent="0" marL="0">
+              <a:lnSpc>
+                <a:spcPts val="1620"/>
+              </a:lnSpc>
+              <a:spcAft>
+                <a:spcPts val="300"/>
+              </a:spcAft>
+              <a:buNone/>
+            </a:pPr>
+            <a:r>
+              <a:rPr lang="en-US" sz="1200" dirty="0">
+                <a:solidFill>
+                  <a:srgbClr val="1C2833"/>
+                </a:solidFill>
+                <a:latin typeface="Arial" pitchFamily="34" charset="0"/>
+                <a:ea typeface="Arial" pitchFamily="34" charset="-122"/>
+                <a:cs typeface="Arial" pitchFamily="34" charset="-120"/>
+              </a:rPr>
+              <a:t> individually.</a:t>
             </a:r>
             <a:endParaRPr lang="en-US" sz="1200" dirty="0"/>
           </a:p>
+          <a:p>
+            <a:pPr algn="l" marL="342900" indent="-342900">
+              <a:lnSpc>
+                <a:spcPts val="1620"/>
+              </a:lnSpc>
+              <a:spcAft>
+                <a:spcPts val="300"/>
+              </a:spcAft>
+              <a:buSzPct val="100000"/>
+              <a:buChar char="•"/>
+            </a:pPr>
+            <a:r>
+              <a:rPr lang="en-US" sz="1200" dirty="0">
+                <a:solidFill>
+                  <a:srgbClr val="1C2833"/>
+                </a:solidFill>
+                <a:latin typeface="Arial" pitchFamily="34" charset="0"/>
+                <a:ea typeface="Arial" pitchFamily="34" charset="-122"/>
+                <a:cs typeface="Arial" pitchFamily="34" charset="-120"/>
+              </a:rPr>
+              <a:t>15 min total: 3 min reading, 12 min solving.</a:t>
+            </a:r>
+            <a:endParaRPr lang="en-US" sz="1200" dirty="0"/>
+          </a:p>
         </p:txBody>
       </p:sp>
       <p:sp>
         <p:nvSpPr>
           <p:cNvPr id="5" name="Text 3"/>
-          <p:cNvSpPr/>
-          <p:nvPr/>
-        </p:nvSpPr>
-        <p:spPr>
-          <a:xfrm>
-            <a:off x="406301" y="1373684"/>
-            <a:ext cx="8498026" cy="213271"/>
-          </a:xfrm>
-          <a:prstGeom prst="rect">
-            <a:avLst/>
-          </a:prstGeom>
-          <a:noFill/>
-          <a:ln/>
-        </p:spPr>
-        <p:txBody>
-          <a:bodyPr wrap="square" lIns="0" tIns="0" rIns="0" bIns="0" rtlCol="0" anchor="t"/>
-          <a:lstStyle/>
-          <a:p>
-            <a:pPr algn="l" indent="0" marL="0">
-              <a:lnSpc>
-                <a:spcPts val="1680"/>
-              </a:lnSpc>
-              <a:spcBef>
-                <a:spcPts val="300"/>
-              </a:spcBef>
-              <a:spcAft>
-                <a:spcPts val="300"/>
-              </a:spcAft>
-              <a:buNone/>
-            </a:pPr>
-            <a:r>
-              <a:rPr lang="en-US" sz="1200" b="1" dirty="0">
-                <a:solidFill>
-                  <a:srgbClr val="1C2833"/>
-                </a:solidFill>
-                <a:latin typeface="Arial" pitchFamily="34" charset="0"/>
-                <a:ea typeface="Arial" pitchFamily="34" charset="-122"/>
-                <a:cs typeface="Arial" pitchFamily="34" charset="-120"/>
-              </a:rPr>
-              <a:t>What each presentation must show:</a:t>
-            </a:r>
-            <a:endParaRPr lang="en-US" sz="1200" dirty="0"/>
-          </a:p>
-        </p:txBody>
-      </p:sp>
-      <p:sp>
-        <p:nvSpPr>
-          <p:cNvPr id="6" name="Text 4"/>
-          <p:cNvSpPr/>
-          <p:nvPr/>
-        </p:nvSpPr>
-        <p:spPr>
-          <a:xfrm>
-            <a:off x="406301" y="1663154"/>
-            <a:ext cx="8498026" cy="426541"/>
-          </a:xfrm>
-          <a:prstGeom prst="rect">
-            <a:avLst/>
-          </a:prstGeom>
-          <a:noFill/>
-          <a:ln/>
-        </p:spPr>
-        <p:txBody>
-          <a:bodyPr wrap="square" lIns="0" tIns="0" rIns="0" bIns="0" rtlCol="0" anchor="t"/>
-          <a:lstStyle/>
-          <a:p>
-            <a:pPr algn="l" indent="0" marL="0">
-              <a:lnSpc>
-                <a:spcPts val="1680"/>
-              </a:lnSpc>
-              <a:spcBef>
-                <a:spcPts val="300"/>
-              </a:spcBef>
-              <a:spcAft>
-                <a:spcPts val="300"/>
-              </a:spcAft>
-              <a:buNone/>
-            </a:pPr>
-            <a:r>
-              <a:rPr lang="en-US" sz="1200" dirty="0">
-                <a:solidFill>
-                  <a:srgbClr val="1C2833"/>
-                </a:solidFill>
-                <a:latin typeface="Arial" pitchFamily="34" charset="0"/>
-                <a:ea typeface="Arial" pitchFamily="34" charset="-122"/>
-                <a:cs typeface="Arial" pitchFamily="34" charset="-120"/>
-              </a:rPr>
-              <a:t>– The constructed magic square (size, magic constant verified). – Citation of the source (Nārāyaṇa Paṇḍita, </a:t>
-            </a:r>
-            <a:pPr algn="l" indent="0" marL="0">
-              <a:lnSpc>
-                <a:spcPts val="1680"/>
-              </a:lnSpc>
-              <a:spcBef>
-                <a:spcPts val="300"/>
-              </a:spcBef>
-              <a:spcAft>
-                <a:spcPts val="300"/>
-              </a:spcAft>
-              <a:buNone/>
-            </a:pPr>
-            <a:r>
-              <a:rPr lang="en-US" sz="1200" i="1" dirty="0">
-                <a:solidFill>
-                  <a:srgbClr val="1C2833"/>
-                </a:solidFill>
-                <a:latin typeface="Arial" pitchFamily="34" charset="0"/>
-                <a:ea typeface="Arial" pitchFamily="34" charset="-122"/>
-                <a:cs typeface="Arial" pitchFamily="34" charset="-120"/>
-              </a:rPr>
-              <a:t>Gaṇita-kaumudī</a:t>
-            </a:r>
-            <a:pPr algn="l" indent="0" marL="0">
-              <a:lnSpc>
-                <a:spcPts val="1680"/>
-              </a:lnSpc>
-              <a:spcBef>
-                <a:spcPts val="300"/>
-              </a:spcBef>
-              <a:spcAft>
-                <a:spcPts val="300"/>
-              </a:spcAft>
-              <a:buNone/>
-            </a:pPr>
-            <a:r>
-              <a:rPr lang="en-US" sz="1200" dirty="0">
-                <a:solidFill>
-                  <a:srgbClr val="1C2833"/>
-                </a:solidFill>
-                <a:latin typeface="Arial" pitchFamily="34" charset="0"/>
-                <a:ea typeface="Arial" pitchFamily="34" charset="-122"/>
-                <a:cs typeface="Arial" pitchFamily="34" charset="-120"/>
-              </a:rPr>
-              <a:t>, 1356 CE). – One sentence on </a:t>
-            </a:r>
-            <a:pPr algn="l" indent="0" marL="0">
-              <a:lnSpc>
-                <a:spcPts val="1680"/>
-              </a:lnSpc>
-              <a:spcBef>
-                <a:spcPts val="300"/>
-              </a:spcBef>
-              <a:spcAft>
-                <a:spcPts val="300"/>
-              </a:spcAft>
-              <a:buNone/>
-            </a:pPr>
-            <a:r>
-              <a:rPr lang="en-US" sz="1200" i="1" dirty="0">
-                <a:solidFill>
-                  <a:srgbClr val="1C2833"/>
-                </a:solidFill>
-                <a:latin typeface="Arial" pitchFamily="34" charset="0"/>
-                <a:ea typeface="Arial" pitchFamily="34" charset="-122"/>
-                <a:cs typeface="Arial" pitchFamily="34" charset="-120"/>
-              </a:rPr>
-              <a:t>why this particular design</a:t>
-            </a:r>
-            <a:pPr algn="l" indent="0" marL="0">
-              <a:lnSpc>
-                <a:spcPts val="1680"/>
-              </a:lnSpc>
-              <a:spcBef>
-                <a:spcPts val="300"/>
-              </a:spcBef>
-              <a:spcAft>
-                <a:spcPts val="300"/>
-              </a:spcAft>
-              <a:buNone/>
-            </a:pPr>
-            <a:r>
-              <a:rPr lang="en-US" sz="1200" dirty="0">
-                <a:solidFill>
-                  <a:srgbClr val="1C2833"/>
-                </a:solidFill>
-                <a:latin typeface="Arial" pitchFamily="34" charset="0"/>
-                <a:ea typeface="Arial" pitchFamily="34" charset="-122"/>
-                <a:cs typeface="Arial" pitchFamily="34" charset="-120"/>
-              </a:rPr>
-              <a:t> — what choice did the pair make?</a:t>
-            </a:r>
-            <a:endParaRPr lang="en-US" sz="1200" dirty="0"/>
-          </a:p>
-        </p:txBody>
-      </p:sp>
-      <p:sp>
-        <p:nvSpPr>
-          <p:cNvPr id="7" name="Text 5"/>
           <p:cNvSpPr/>
           <p:nvPr/>
         </p:nvSpPr>
@@ -3995,7 +4397,7 @@
                 <a:ea typeface="Georgia" pitchFamily="34" charset="-122"/>
                 <a:cs typeface="Georgia" pitchFamily="34" charset="-120"/>
               </a:rPr>
-              <a:t>Wrap-up (5 min)</a:t>
+              <a:t>Presentations (25 min)</a:t>
             </a:r>
             <a:endParaRPr lang="en-US" sz="1800" dirty="0"/>
           </a:p>
@@ -4009,8 +4411,8 @@
         </p:nvSpPr>
         <p:spPr>
           <a:xfrm>
-            <a:off x="406301" y="870942"/>
-            <a:ext cx="8498026" cy="639812"/>
+            <a:off x="634901" y="883593"/>
+            <a:ext cx="8102798" cy="769441"/>
           </a:xfrm>
           <a:prstGeom prst="rect">
             <a:avLst/>
@@ -4022,6 +4424,140 @@
           <a:bodyPr wrap="square" lIns="0" tIns="0" rIns="0" bIns="0" rtlCol="0" anchor="t"/>
           <a:lstStyle/>
           <a:p>
+            <a:pPr algn="l" marL="342900" indent="-342900">
+              <a:lnSpc>
+                <a:spcPts val="1620"/>
+              </a:lnSpc>
+              <a:spcAft>
+                <a:spcPts val="300"/>
+              </a:spcAft>
+              <a:buSzPct val="100000"/>
+              <a:buChar char="•"/>
+            </a:pPr>
+            <a:r>
+              <a:rPr lang="en-US" sz="1200" dirty="0">
+                <a:solidFill>
+                  <a:srgbClr val="1C2833"/>
+                </a:solidFill>
+                <a:latin typeface="Arial" pitchFamily="34" charset="0"/>
+                <a:ea typeface="Arial" pitchFamily="34" charset="-122"/>
+                <a:cs typeface="Arial" pitchFamily="34" charset="-120"/>
+              </a:rPr>
+              <a:t>Each pair gets </a:t>
+            </a:r>
+            <a:pPr algn="l" indent="0" marL="0">
+              <a:lnSpc>
+                <a:spcPts val="1620"/>
+              </a:lnSpc>
+              <a:spcAft>
+                <a:spcPts val="300"/>
+              </a:spcAft>
+              <a:buNone/>
+            </a:pPr>
+            <a:r>
+              <a:rPr lang="en-US" sz="1200" b="1" dirty="0">
+                <a:solidFill>
+                  <a:srgbClr val="1C2833"/>
+                </a:solidFill>
+                <a:latin typeface="Arial" pitchFamily="34" charset="0"/>
+                <a:ea typeface="Arial" pitchFamily="34" charset="-122"/>
+                <a:cs typeface="Arial" pitchFamily="34" charset="-120"/>
+              </a:rPr>
+              <a:t>2 minutes</a:t>
+            </a:r>
+            <a:pPr algn="l" indent="0" marL="0">
+              <a:lnSpc>
+                <a:spcPts val="1620"/>
+              </a:lnSpc>
+              <a:spcAft>
+                <a:spcPts val="300"/>
+              </a:spcAft>
+              <a:buNone/>
+            </a:pPr>
+            <a:r>
+              <a:rPr lang="en-US" sz="1200" dirty="0">
+                <a:solidFill>
+                  <a:srgbClr val="1C2833"/>
+                </a:solidFill>
+                <a:latin typeface="Arial" pitchFamily="34" charset="0"/>
+                <a:ea typeface="Arial" pitchFamily="34" charset="-122"/>
+                <a:cs typeface="Arial" pitchFamily="34" charset="-120"/>
+              </a:rPr>
+              <a:t> to present + 1 minute Q&amp;A.</a:t>
+            </a:r>
+            <a:endParaRPr lang="en-US" sz="1200" dirty="0"/>
+          </a:p>
+          <a:p>
+            <a:pPr algn="l" marL="342900" indent="-342900">
+              <a:lnSpc>
+                <a:spcPts val="1620"/>
+              </a:lnSpc>
+              <a:spcAft>
+                <a:spcPts val="300"/>
+              </a:spcAft>
+              <a:buSzPct val="100000"/>
+              <a:buChar char="•"/>
+            </a:pPr>
+            <a:r>
+              <a:rPr lang="en-US" sz="1200" dirty="0">
+                <a:solidFill>
+                  <a:srgbClr val="1C2833"/>
+                </a:solidFill>
+                <a:latin typeface="Arial" pitchFamily="34" charset="0"/>
+                <a:ea typeface="Arial" pitchFamily="34" charset="-122"/>
+                <a:cs typeface="Arial" pitchFamily="34" charset="-120"/>
+              </a:rPr>
+              <a:t>With ~10–12 pairs in a typical class, this fits in 25 min.</a:t>
+            </a:r>
+            <a:endParaRPr lang="en-US" sz="1200" dirty="0"/>
+          </a:p>
+          <a:p>
+            <a:pPr algn="l" marL="342900" indent="-342900">
+              <a:lnSpc>
+                <a:spcPts val="1620"/>
+              </a:lnSpc>
+              <a:spcAft>
+                <a:spcPts val="300"/>
+              </a:spcAft>
+              <a:buSzPct val="100000"/>
+              <a:buChar char="•"/>
+            </a:pPr>
+            <a:r>
+              <a:rPr lang="en-US" sz="1200" dirty="0">
+                <a:solidFill>
+                  <a:srgbClr val="1C2833"/>
+                </a:solidFill>
+                <a:latin typeface="Arial" pitchFamily="34" charset="0"/>
+                <a:ea typeface="Arial" pitchFamily="34" charset="-122"/>
+                <a:cs typeface="Arial" pitchFamily="34" charset="-120"/>
+              </a:rPr>
+              <a:t>Order: teacher draws pair names randomly.</a:t>
+            </a:r>
+            <a:endParaRPr lang="en-US" sz="1200" dirty="0"/>
+          </a:p>
+        </p:txBody>
+      </p:sp>
+      <p:sp>
+        <p:nvSpPr>
+          <p:cNvPr id="5" name="Text 3"/>
+          <p:cNvSpPr/>
+          <p:nvPr/>
+        </p:nvSpPr>
+        <p:spPr>
+          <a:xfrm>
+            <a:off x="406301" y="1741884"/>
+            <a:ext cx="8498026" cy="213271"/>
+          </a:xfrm>
+          <a:prstGeom prst="rect">
+            <a:avLst/>
+          </a:prstGeom>
+          <a:noFill/>
+          <a:ln/>
+        </p:spPr>
+        <p:txBody>
+          <a:bodyPr wrap="square" lIns="0" tIns="0" rIns="0" bIns="0" rtlCol="0" anchor="t"/>
+          <a:lstStyle/>
+          <a:p>
             <a:pPr algn="l" indent="0" marL="0">
               <a:lnSpc>
                 <a:spcPts val="1680"/>
@@ -4035,84 +4571,15 @@
               <a:buNone/>
             </a:pPr>
             <a:r>
-              <a:rPr lang="en-US" sz="1200" dirty="0">
-                <a:solidFill>
-                  <a:srgbClr val="1C2833"/>
-                </a:solidFill>
-                <a:latin typeface="Arial" pitchFamily="34" charset="0"/>
-                <a:ea typeface="Arial" pitchFamily="34" charset="-122"/>
-                <a:cs typeface="Arial" pitchFamily="34" charset="-120"/>
-              </a:rPr>
-              <a:t>– One question per student on a slip of paper: </a:t>
-            </a:r>
-            <a:pPr algn="l" indent="0" marL="0">
-              <a:lnSpc>
-                <a:spcPts val="1680"/>
-              </a:lnSpc>
-              <a:spcBef>
-                <a:spcPts val="300"/>
-              </a:spcBef>
-              <a:spcAft>
-                <a:spcPts val="300"/>
-              </a:spcAft>
-              <a:buNone/>
-            </a:pPr>
-            <a:r>
-              <a:rPr lang="en-US" sz="1200" i="1" dirty="0">
-                <a:solidFill>
-                  <a:srgbClr val="1C2833"/>
-                </a:solidFill>
-                <a:latin typeface="Arial" pitchFamily="34" charset="0"/>
-                <a:ea typeface="Arial" pitchFamily="34" charset="-122"/>
-                <a:cs typeface="Arial" pitchFamily="34" charset="-120"/>
-              </a:rPr>
-              <a:t>"What is one thing you'll remember about magic squares one year from now?"</a:t>
-            </a:r>
-            <a:pPr algn="l" indent="0" marL="0">
-              <a:lnSpc>
-                <a:spcPts val="1680"/>
-              </a:lnSpc>
-              <a:spcBef>
-                <a:spcPts val="300"/>
-              </a:spcBef>
-              <a:spcAft>
-                <a:spcPts val="300"/>
-              </a:spcAft>
-              <a:buNone/>
-            </a:pPr>
-            <a:r>
-              <a:rPr lang="en-US" sz="1200" dirty="0">
-                <a:solidFill>
-                  <a:srgbClr val="1C2833"/>
-                </a:solidFill>
-                <a:latin typeface="Arial" pitchFamily="34" charset="0"/>
-                <a:ea typeface="Arial" pitchFamily="34" charset="-122"/>
-                <a:cs typeface="Arial" pitchFamily="34" charset="-120"/>
-              </a:rPr>
-              <a:t> – Collect. Read at random — 2–3 aloud. – Close with: </a:t>
-            </a:r>
-            <a:pPr algn="l" indent="0" marL="0">
-              <a:lnSpc>
-                <a:spcPts val="1680"/>
-              </a:lnSpc>
-              <a:spcBef>
-                <a:spcPts val="300"/>
-              </a:spcBef>
-              <a:spcAft>
-                <a:spcPts val="300"/>
-              </a:spcAft>
-              <a:buNone/>
-            </a:pPr>
-            <a:r>
-              <a:rPr lang="en-US" sz="1200" i="1" dirty="0">
-                <a:solidFill>
-                  <a:srgbClr val="1C2833"/>
-                </a:solidFill>
-                <a:latin typeface="Arial" pitchFamily="34" charset="0"/>
-                <a:ea typeface="Arial" pitchFamily="34" charset="-122"/>
-                <a:cs typeface="Arial" pitchFamily="34" charset="-120"/>
-              </a:rPr>
-              <a:t>"You all now know an algorithm older than most countries' modern names. Use it. Show someone."</a:t>
+              <a:rPr lang="en-US" sz="1200" b="1" dirty="0">
+                <a:solidFill>
+                  <a:srgbClr val="1C2833"/>
+                </a:solidFill>
+                <a:latin typeface="Arial" pitchFamily="34" charset="0"/>
+                <a:ea typeface="Arial" pitchFamily="34" charset="-122"/>
+                <a:cs typeface="Arial" pitchFamily="34" charset="-120"/>
+              </a:rPr>
+              <a:t>What each presentation must show:</a:t>
             </a:r>
             <a:endParaRPr lang="en-US" sz="1200" dirty="0"/>
           </a:p>
@@ -4120,7 +4587,7 @@
       </p:sp>
       <p:sp>
         <p:nvSpPr>
-          <p:cNvPr id="5" name="Text 3"/>
+          <p:cNvPr id="6" name="Text 4"/>
           <p:cNvSpPr/>
           <p:nvPr/>
         </p:nvSpPr>
@@ -4270,7 +4737,7 @@
                 <a:ea typeface="Georgia" pitchFamily="34" charset="-122"/>
                 <a:cs typeface="Georgia" pitchFamily="34" charset="-120"/>
               </a:rPr>
-              <a:t>Student-facing content</a:t>
+              <a:t>Presentations (25 min) (cont.)</a:t>
             </a:r>
             <a:endParaRPr lang="en-US" sz="1800" dirty="0"/>
           </a:p>
@@ -4284,61 +4751,8 @@
         </p:nvSpPr>
         <p:spPr>
           <a:xfrm>
-            <a:off x="406301" y="883593"/>
-            <a:ext cx="8331398" cy="1612106"/>
-          </a:xfrm>
-          <a:prstGeom prst="rect">
-            <a:avLst/>
-          </a:prstGeom>
-          <a:solidFill>
-            <a:srgbClr val="F4F8F9"/>
-          </a:solidFill>
-          <a:ln/>
-        </p:spPr>
-        <p:txBody>
-          <a:bodyPr wrap="square" rtlCol="0" anchor="ctr"/>
-          <a:lstStyle/>
-          <a:p>
-            <a:pPr indent="0" marL="0">
-              <a:buNone/>
-            </a:pPr>
-            <a:endParaRPr lang="en-US" dirty="0"/>
-          </a:p>
-        </p:txBody>
-      </p:sp>
-      <p:sp>
-        <p:nvSpPr>
-          <p:cNvPr id="5" name="Shape 3"/>
-          <p:cNvSpPr/>
-          <p:nvPr/>
-        </p:nvSpPr>
-        <p:spPr>
-          <a:xfrm>
-            <a:off x="434876" y="883593"/>
-            <a:ext cx="0" cy="1612106"/>
-          </a:xfrm>
-          <a:prstGeom prst="line">
-            <a:avLst/>
-          </a:prstGeom>
-          <a:noFill/>
-          <a:ln w="57150">
-            <a:solidFill>
-              <a:srgbClr val="FE4447"/>
-            </a:solidFill>
-            <a:prstDash val="solid"/>
-          </a:ln>
-        </p:spPr>
-      </p:sp>
-      <p:sp>
-        <p:nvSpPr>
-          <p:cNvPr id="6" name="Text 4"/>
-          <p:cNvSpPr/>
-          <p:nvPr/>
-        </p:nvSpPr>
-        <p:spPr>
-          <a:xfrm>
-            <a:off x="692051" y="1074093"/>
-            <a:ext cx="7973389" cy="230981"/>
+            <a:off x="634901" y="883593"/>
+            <a:ext cx="8102798" cy="769441"/>
           </a:xfrm>
           <a:prstGeom prst="rect">
             <a:avLst/>
@@ -4350,224 +4764,162 @@
           <a:bodyPr wrap="square" lIns="0" tIns="0" rIns="0" bIns="0" rtlCol="0" anchor="t"/>
           <a:lstStyle/>
           <a:p>
-            <a:pPr algn="l" indent="0" marL="0">
-              <a:lnSpc>
-                <a:spcPts val="1820"/>
-              </a:lnSpc>
-              <a:spcBef>
-                <a:spcPts val="300"/>
-              </a:spcBef>
-              <a:spcAft>
-                <a:spcPts val="300"/>
-              </a:spcAft>
-              <a:buNone/>
-            </a:pPr>
-            <a:r>
-              <a:rPr lang="en-US" sz="1300" b="1" i="1" dirty="0">
-                <a:solidFill>
-                  <a:srgbClr val="1C2833"/>
-                </a:solidFill>
-                <a:latin typeface="Georgia" pitchFamily="34" charset="0"/>
-                <a:ea typeface="Georgia" pitchFamily="34" charset="-122"/>
-                <a:cs typeface="Georgia" pitchFamily="34" charset="-120"/>
-              </a:rPr>
-              <a:t>Today is the share.</a:t>
-            </a:r>
-            <a:endParaRPr lang="en-US" sz="1300" dirty="0"/>
-          </a:p>
-        </p:txBody>
-      </p:sp>
-      <p:sp>
-        <p:nvSpPr>
-          <p:cNvPr id="7" name="Text 5"/>
-          <p:cNvSpPr/>
-          <p:nvPr/>
-        </p:nvSpPr>
-        <p:spPr>
-          <a:xfrm>
-            <a:off x="692051" y="1343174"/>
-            <a:ext cx="7973389" cy="461963"/>
-          </a:xfrm>
-          <a:prstGeom prst="rect">
-            <a:avLst/>
-          </a:prstGeom>
-          <a:noFill/>
-          <a:ln/>
-        </p:spPr>
-        <p:txBody>
-          <a:bodyPr wrap="square" lIns="0" tIns="0" rIns="0" bIns="0" rtlCol="0" anchor="t"/>
-          <a:lstStyle/>
-          <a:p>
-            <a:pPr algn="l" indent="0" marL="0">
-              <a:lnSpc>
-                <a:spcPts val="1820"/>
-              </a:lnSpc>
-              <a:spcBef>
-                <a:spcPts val="300"/>
-              </a:spcBef>
-              <a:spcAft>
-                <a:spcPts val="300"/>
-              </a:spcAft>
-              <a:buNone/>
-            </a:pPr>
-            <a:r>
-              <a:rPr lang="en-US" sz="1300" i="1" dirty="0">
-                <a:solidFill>
-                  <a:srgbClr val="1C2833"/>
-                </a:solidFill>
-                <a:latin typeface="Georgia" pitchFamily="34" charset="0"/>
-                <a:ea typeface="Georgia" pitchFamily="34" charset="-122"/>
-                <a:cs typeface="Georgia" pitchFamily="34" charset="-120"/>
-              </a:rPr>
-              <a:t>Bring: - Your project artefact (poster / video / written exposition). - Your two-minute presentation prepared. - Your full attention for your classmates' presentations — you will give feedback.</a:t>
-            </a:r>
-            <a:endParaRPr lang="en-US" sz="1300" dirty="0"/>
-          </a:p>
-        </p:txBody>
-      </p:sp>
-      <p:sp>
-        <p:nvSpPr>
-          <p:cNvPr id="8" name="Text 6"/>
-          <p:cNvSpPr/>
-          <p:nvPr/>
-        </p:nvSpPr>
-        <p:spPr>
-          <a:xfrm>
-            <a:off x="692051" y="1843236"/>
-            <a:ext cx="7973389" cy="461963"/>
-          </a:xfrm>
-          <a:prstGeom prst="rect">
-            <a:avLst/>
-          </a:prstGeom>
-          <a:noFill/>
-          <a:ln/>
-        </p:spPr>
-        <p:txBody>
-          <a:bodyPr wrap="square" lIns="0" tIns="0" rIns="0" bIns="0" rtlCol="0" anchor="t"/>
-          <a:lstStyle/>
-          <a:p>
-            <a:pPr algn="l" indent="0" marL="0">
-              <a:lnSpc>
-                <a:spcPts val="1820"/>
-              </a:lnSpc>
-              <a:spcBef>
-                <a:spcPts val="300"/>
-              </a:spcBef>
-              <a:spcAft>
-                <a:spcPts val="300"/>
-              </a:spcAft>
-              <a:buNone/>
-            </a:pPr>
-            <a:r>
-              <a:rPr lang="en-US" sz="1300" dirty="0">
-                <a:solidFill>
-                  <a:srgbClr val="1C2833"/>
-                </a:solidFill>
-                <a:latin typeface="Georgia" pitchFamily="34" charset="0"/>
-                <a:ea typeface="Georgia" pitchFamily="34" charset="-122"/>
-                <a:cs typeface="Georgia" pitchFamily="34" charset="-120"/>
-              </a:rPr>
-              <a:t>Reminder: </a:t>
-            </a:r>
-            <a:pPr algn="l" indent="0" marL="0">
-              <a:lnSpc>
-                <a:spcPts val="1820"/>
-              </a:lnSpc>
-              <a:spcBef>
-                <a:spcPts val="300"/>
-              </a:spcBef>
-              <a:spcAft>
-                <a:spcPts val="300"/>
-              </a:spcAft>
-              <a:buNone/>
-            </a:pPr>
-            <a:r>
-              <a:rPr lang="en-US" sz="1300" b="1" i="1" dirty="0">
-                <a:solidFill>
-                  <a:srgbClr val="1C2833"/>
-                </a:solidFill>
-                <a:latin typeface="Georgia" pitchFamily="34" charset="0"/>
-                <a:ea typeface="Georgia" pitchFamily="34" charset="-122"/>
-                <a:cs typeface="Georgia" pitchFamily="34" charset="-120"/>
-              </a:rPr>
-              <a:t>Verify before you present.</a:t>
-            </a:r>
-            <a:pPr algn="l" indent="0" marL="0">
-              <a:lnSpc>
-                <a:spcPts val="1820"/>
-              </a:lnSpc>
-              <a:spcBef>
-                <a:spcPts val="300"/>
-              </a:spcBef>
-              <a:spcAft>
-                <a:spcPts val="300"/>
-              </a:spcAft>
-              <a:buNone/>
-            </a:pPr>
-            <a:r>
-              <a:rPr lang="en-US" sz="1300" dirty="0">
-                <a:solidFill>
-                  <a:srgbClr val="1C2833"/>
-                </a:solidFill>
-                <a:latin typeface="Georgia" pitchFamily="34" charset="0"/>
-                <a:ea typeface="Georgia" pitchFamily="34" charset="-122"/>
-                <a:cs typeface="Georgia" pitchFamily="34" charset="-120"/>
-              </a:rPr>
-              <a:t> Sum at least 3 rows, 3 columns, and both diagonals out loud (or in your head). If they don't match the magic constant, fix the error </a:t>
-            </a:r>
-            <a:pPr algn="l" indent="0" marL="0">
-              <a:lnSpc>
-                <a:spcPts val="1820"/>
-              </a:lnSpc>
-              <a:spcBef>
-                <a:spcPts val="300"/>
-              </a:spcBef>
-              <a:spcAft>
-                <a:spcPts val="300"/>
-              </a:spcAft>
-              <a:buNone/>
-            </a:pPr>
-            <a:r>
-              <a:rPr lang="en-US" sz="1300" i="1" dirty="0">
-                <a:solidFill>
-                  <a:srgbClr val="1C2833"/>
-                </a:solidFill>
-                <a:latin typeface="Georgia" pitchFamily="34" charset="0"/>
-                <a:ea typeface="Georgia" pitchFamily="34" charset="-122"/>
-                <a:cs typeface="Georgia" pitchFamily="34" charset="-120"/>
-              </a:rPr>
-              <a:t>before</a:t>
-            </a:r>
-            <a:pPr algn="l" indent="0" marL="0">
-              <a:lnSpc>
-                <a:spcPts val="1820"/>
-              </a:lnSpc>
-              <a:spcBef>
-                <a:spcPts val="300"/>
-              </a:spcBef>
-              <a:spcAft>
-                <a:spcPts val="300"/>
-              </a:spcAft>
-              <a:buNone/>
-            </a:pPr>
-            <a:r>
-              <a:rPr lang="en-US" sz="1300" dirty="0">
-                <a:solidFill>
-                  <a:srgbClr val="1C2833"/>
-                </a:solidFill>
-                <a:latin typeface="Georgia" pitchFamily="34" charset="0"/>
-                <a:ea typeface="Georgia" pitchFamily="34" charset="-122"/>
-                <a:cs typeface="Georgia" pitchFamily="34" charset="-120"/>
-              </a:rPr>
-              <a:t> you stand up.</a:t>
-            </a:r>
-            <a:endParaRPr lang="en-US" sz="1300" dirty="0"/>
-          </a:p>
-        </p:txBody>
-      </p:sp>
-      <p:sp>
-        <p:nvSpPr>
-          <p:cNvPr id="9" name="Text 7"/>
+            <a:pPr algn="l" marL="342900" indent="-342900">
+              <a:lnSpc>
+                <a:spcPts val="1620"/>
+              </a:lnSpc>
+              <a:spcAft>
+                <a:spcPts val="300"/>
+              </a:spcAft>
+              <a:buSzPct val="100000"/>
+              <a:buChar char="•"/>
+            </a:pPr>
+            <a:r>
+              <a:rPr lang="en-US" sz="1200" dirty="0">
+                <a:solidFill>
+                  <a:srgbClr val="1C2833"/>
+                </a:solidFill>
+                <a:latin typeface="Arial" pitchFamily="34" charset="0"/>
+                <a:ea typeface="Arial" pitchFamily="34" charset="-122"/>
+                <a:cs typeface="Arial" pitchFamily="34" charset="-120"/>
+              </a:rPr>
+              <a:t>The constructed magic square (size, magic constant verified).</a:t>
+            </a:r>
+            <a:endParaRPr lang="en-US" sz="1200" dirty="0"/>
+          </a:p>
+          <a:p>
+            <a:pPr algn="l" marL="342900" indent="-342900">
+              <a:lnSpc>
+                <a:spcPts val="1620"/>
+              </a:lnSpc>
+              <a:spcAft>
+                <a:spcPts val="300"/>
+              </a:spcAft>
+              <a:buSzPct val="100000"/>
+              <a:buChar char="•"/>
+            </a:pPr>
+            <a:r>
+              <a:rPr lang="en-US" sz="1200" dirty="0">
+                <a:solidFill>
+                  <a:srgbClr val="1C2833"/>
+                </a:solidFill>
+                <a:latin typeface="Arial" pitchFamily="34" charset="0"/>
+                <a:ea typeface="Arial" pitchFamily="34" charset="-122"/>
+                <a:cs typeface="Arial" pitchFamily="34" charset="-120"/>
+              </a:rPr>
+              <a:t>Citation of the source (Nārāyaṇa Paṇḍita, </a:t>
+            </a:r>
+            <a:pPr algn="l" indent="0" marL="0">
+              <a:lnSpc>
+                <a:spcPts val="1620"/>
+              </a:lnSpc>
+              <a:spcAft>
+                <a:spcPts val="300"/>
+              </a:spcAft>
+              <a:buNone/>
+            </a:pPr>
+            <a:r>
+              <a:rPr lang="en-US" sz="1200" i="1" dirty="0">
+                <a:solidFill>
+                  <a:srgbClr val="1C2833"/>
+                </a:solidFill>
+                <a:latin typeface="Arial" pitchFamily="34" charset="0"/>
+                <a:ea typeface="Arial" pitchFamily="34" charset="-122"/>
+                <a:cs typeface="Arial" pitchFamily="34" charset="-120"/>
+              </a:rPr>
+              <a:t>Gaṇita-kaumudī</a:t>
+            </a:r>
+            <a:pPr algn="l" indent="0" marL="0">
+              <a:lnSpc>
+                <a:spcPts val="1620"/>
+              </a:lnSpc>
+              <a:spcAft>
+                <a:spcPts val="300"/>
+              </a:spcAft>
+              <a:buNone/>
+            </a:pPr>
+            <a:r>
+              <a:rPr lang="en-US" sz="1200" dirty="0">
+                <a:solidFill>
+                  <a:srgbClr val="1C2833"/>
+                </a:solidFill>
+                <a:latin typeface="Arial" pitchFamily="34" charset="0"/>
+                <a:ea typeface="Arial" pitchFamily="34" charset="-122"/>
+                <a:cs typeface="Arial" pitchFamily="34" charset="-120"/>
+              </a:rPr>
+              <a:t>, 1356 CE).</a:t>
+            </a:r>
+            <a:endParaRPr lang="en-US" sz="1200" dirty="0"/>
+          </a:p>
+          <a:p>
+            <a:pPr algn="l" marL="342900" indent="-342900">
+              <a:lnSpc>
+                <a:spcPts val="1620"/>
+              </a:lnSpc>
+              <a:spcAft>
+                <a:spcPts val="300"/>
+              </a:spcAft>
+              <a:buSzPct val="100000"/>
+              <a:buChar char="•"/>
+            </a:pPr>
+            <a:r>
+              <a:rPr lang="en-US" sz="1200" dirty="0">
+                <a:solidFill>
+                  <a:srgbClr val="1C2833"/>
+                </a:solidFill>
+                <a:latin typeface="Arial" pitchFamily="34" charset="0"/>
+                <a:ea typeface="Arial" pitchFamily="34" charset="-122"/>
+                <a:cs typeface="Arial" pitchFamily="34" charset="-120"/>
+              </a:rPr>
+              <a:t>One sentence on </a:t>
+            </a:r>
+            <a:pPr algn="l" indent="0" marL="0">
+              <a:lnSpc>
+                <a:spcPts val="1620"/>
+              </a:lnSpc>
+              <a:spcAft>
+                <a:spcPts val="300"/>
+              </a:spcAft>
+              <a:buNone/>
+            </a:pPr>
+            <a:r>
+              <a:rPr lang="en-US" sz="1200" i="1" dirty="0">
+                <a:solidFill>
+                  <a:srgbClr val="1C2833"/>
+                </a:solidFill>
+                <a:latin typeface="Arial" pitchFamily="34" charset="0"/>
+                <a:ea typeface="Arial" pitchFamily="34" charset="-122"/>
+                <a:cs typeface="Arial" pitchFamily="34" charset="-120"/>
+              </a:rPr>
+              <a:t>why this particular design</a:t>
+            </a:r>
+            <a:pPr algn="l" indent="0" marL="0">
+              <a:lnSpc>
+                <a:spcPts val="1620"/>
+              </a:lnSpc>
+              <a:spcAft>
+                <a:spcPts val="300"/>
+              </a:spcAft>
+              <a:buNone/>
+            </a:pPr>
+            <a:r>
+              <a:rPr lang="en-US" sz="1200" dirty="0">
+                <a:solidFill>
+                  <a:srgbClr val="1C2833"/>
+                </a:solidFill>
+                <a:latin typeface="Arial" pitchFamily="34" charset="0"/>
+                <a:ea typeface="Arial" pitchFamily="34" charset="-122"/>
+                <a:cs typeface="Arial" pitchFamily="34" charset="-120"/>
+              </a:rPr>
+              <a:t> — what choice did the pair make?</a:t>
+            </a:r>
+            <a:endParaRPr lang="en-US" sz="1200" dirty="0"/>
+          </a:p>
+        </p:txBody>
+      </p:sp>
+      <p:sp>
+        <p:nvSpPr>
+          <p:cNvPr id="5" name="Text 3"/>
           <p:cNvSpPr/>
           <p:nvPr/>
         </p:nvSpPr>
@@ -4717,7 +5069,7 @@
                 <a:ea typeface="Georgia" pitchFamily="34" charset="-122"/>
                 <a:cs typeface="Georgia" pitchFamily="34" charset="-120"/>
               </a:rPr>
-              <a:t>Homework — none</a:t>
+              <a:t>Wrap-up (5 min)</a:t>
             </a:r>
             <a:endParaRPr lang="en-US" sz="1800" dirty="0"/>
           </a:p>
@@ -4731,8 +5083,8 @@
         </p:nvSpPr>
         <p:spPr>
           <a:xfrm>
-            <a:off x="406301" y="870942"/>
-            <a:ext cx="8498026" cy="426541"/>
+            <a:off x="634901" y="883593"/>
+            <a:ext cx="8102798" cy="975122"/>
           </a:xfrm>
           <a:prstGeom prst="rect">
             <a:avLst/>
@@ -4744,17 +5096,15 @@
           <a:bodyPr wrap="square" lIns="0" tIns="0" rIns="0" bIns="0" rtlCol="0" anchor="t"/>
           <a:lstStyle/>
           <a:p>
-            <a:pPr algn="l" indent="0" marL="0">
-              <a:lnSpc>
-                <a:spcPts val="1680"/>
-              </a:lnSpc>
-              <a:spcBef>
-                <a:spcPts val="300"/>
-              </a:spcBef>
-              <a:spcAft>
-                <a:spcPts val="300"/>
-              </a:spcAft>
-              <a:buNone/>
+            <a:pPr algn="l" marL="342900" indent="-342900">
+              <a:lnSpc>
+                <a:spcPts val="1620"/>
+              </a:lnSpc>
+              <a:spcAft>
+                <a:spcPts val="300"/>
+              </a:spcAft>
+              <a:buSzPct val="100000"/>
+              <a:buChar char="•"/>
             </a:pPr>
             <a:r>
               <a:rPr lang="en-US" sz="1200" dirty="0">
@@ -4765,7 +5115,95 @@
                 <a:ea typeface="Arial" pitchFamily="34" charset="-122"/>
                 <a:cs typeface="Arial" pitchFamily="34" charset="-120"/>
               </a:rPr>
-              <a:t>The module ends here. The project artefact stays with the school until the end of term as part of the module's portfolio. Reflection slips are collected.</a:t>
+              <a:t>One question per student on a slip of paper: </a:t>
+            </a:r>
+            <a:pPr algn="l" indent="0" marL="0">
+              <a:lnSpc>
+                <a:spcPts val="1620"/>
+              </a:lnSpc>
+              <a:spcAft>
+                <a:spcPts val="300"/>
+              </a:spcAft>
+              <a:buNone/>
+            </a:pPr>
+            <a:r>
+              <a:rPr lang="en-US" sz="1200" i="1" dirty="0">
+                <a:solidFill>
+                  <a:srgbClr val="1C2833"/>
+                </a:solidFill>
+                <a:latin typeface="Arial" pitchFamily="34" charset="0"/>
+                <a:ea typeface="Arial" pitchFamily="34" charset="-122"/>
+                <a:cs typeface="Arial" pitchFamily="34" charset="-120"/>
+              </a:rPr>
+              <a:t>"What is one thing you'll remember about magic squares one year from now?"</a:t>
+            </a:r>
+            <a:endParaRPr lang="en-US" sz="1200" dirty="0"/>
+          </a:p>
+          <a:p>
+            <a:pPr algn="l" marL="342900" indent="-342900">
+              <a:lnSpc>
+                <a:spcPts val="1620"/>
+              </a:lnSpc>
+              <a:spcAft>
+                <a:spcPts val="300"/>
+              </a:spcAft>
+              <a:buSzPct val="100000"/>
+              <a:buChar char="•"/>
+            </a:pPr>
+            <a:r>
+              <a:rPr lang="en-US" sz="1200" dirty="0">
+                <a:solidFill>
+                  <a:srgbClr val="1C2833"/>
+                </a:solidFill>
+                <a:latin typeface="Arial" pitchFamily="34" charset="0"/>
+                <a:ea typeface="Arial" pitchFamily="34" charset="-122"/>
+                <a:cs typeface="Arial" pitchFamily="34" charset="-120"/>
+              </a:rPr>
+              <a:t>Collect. Read at random — 2–3 aloud.</a:t>
+            </a:r>
+            <a:endParaRPr lang="en-US" sz="1200" dirty="0"/>
+          </a:p>
+          <a:p>
+            <a:pPr algn="l" marL="342900" indent="-342900">
+              <a:lnSpc>
+                <a:spcPts val="1620"/>
+              </a:lnSpc>
+              <a:spcAft>
+                <a:spcPts val="300"/>
+              </a:spcAft>
+              <a:buSzPct val="100000"/>
+              <a:buChar char="•"/>
+            </a:pPr>
+            <a:r>
+              <a:rPr lang="en-US" sz="1200" dirty="0">
+                <a:solidFill>
+                  <a:srgbClr val="1C2833"/>
+                </a:solidFill>
+                <a:latin typeface="Arial" pitchFamily="34" charset="0"/>
+                <a:ea typeface="Arial" pitchFamily="34" charset="-122"/>
+                <a:cs typeface="Arial" pitchFamily="34" charset="-120"/>
+              </a:rPr>
+              <a:t>Close with: </a:t>
+            </a:r>
+            <a:pPr algn="l" indent="0" marL="0">
+              <a:lnSpc>
+                <a:spcPts val="1620"/>
+              </a:lnSpc>
+              <a:spcAft>
+                <a:spcPts val="300"/>
+              </a:spcAft>
+              <a:buNone/>
+            </a:pPr>
+            <a:r>
+              <a:rPr lang="en-US" sz="1200" i="1" dirty="0">
+                <a:solidFill>
+                  <a:srgbClr val="1C2833"/>
+                </a:solidFill>
+                <a:latin typeface="Arial" pitchFamily="34" charset="0"/>
+                <a:ea typeface="Arial" pitchFamily="34" charset="-122"/>
+                <a:cs typeface="Arial" pitchFamily="34" charset="-120"/>
+              </a:rPr>
+              <a:t>"You all now know an algorithm older than most countries' modern names. Use it. Show someone."</a:t>
             </a:r>
             <a:endParaRPr lang="en-US" sz="1200" dirty="0"/>
           </a:p>
@@ -4923,7 +5361,7 @@
                 <a:ea typeface="Georgia" pitchFamily="34" charset="-122"/>
                 <a:cs typeface="Georgia" pitchFamily="34" charset="-120"/>
               </a:rPr>
-              <a:t>Differentiation</a:t>
+              <a:t>Student-facing content</a:t>
             </a:r>
             <a:endParaRPr lang="en-US" sz="1800" dirty="0"/>
           </a:p>
@@ -4937,8 +5375,61 @@
         </p:nvSpPr>
         <p:spPr>
           <a:xfrm>
-            <a:off x="634901" y="883593"/>
-            <a:ext cx="8102798" cy="937022"/>
+            <a:off x="406301" y="883593"/>
+            <a:ext cx="8331398" cy="2188369"/>
+          </a:xfrm>
+          <a:prstGeom prst="rect">
+            <a:avLst/>
+          </a:prstGeom>
+          <a:solidFill>
+            <a:srgbClr val="F4F8F9"/>
+          </a:solidFill>
+          <a:ln/>
+        </p:spPr>
+        <p:txBody>
+          <a:bodyPr wrap="square" rtlCol="0" anchor="ctr"/>
+          <a:lstStyle/>
+          <a:p>
+            <a:pPr indent="0" marL="0">
+              <a:buNone/>
+            </a:pPr>
+            <a:endParaRPr lang="en-US" dirty="0"/>
+          </a:p>
+        </p:txBody>
+      </p:sp>
+      <p:sp>
+        <p:nvSpPr>
+          <p:cNvPr id="5" name="Shape 3"/>
+          <p:cNvSpPr/>
+          <p:nvPr/>
+        </p:nvSpPr>
+        <p:spPr>
+          <a:xfrm>
+            <a:off x="434876" y="883593"/>
+            <a:ext cx="0" cy="2188369"/>
+          </a:xfrm>
+          <a:prstGeom prst="line">
+            <a:avLst/>
+          </a:prstGeom>
+          <a:noFill/>
+          <a:ln w="57150">
+            <a:solidFill>
+              <a:srgbClr val="FE4447"/>
+            </a:solidFill>
+            <a:prstDash val="solid"/>
+          </a:ln>
+        </p:spPr>
+      </p:sp>
+      <p:sp>
+        <p:nvSpPr>
+          <p:cNvPr id="6" name="Text 4"/>
+          <p:cNvSpPr/>
+          <p:nvPr/>
+        </p:nvSpPr>
+        <p:spPr>
+          <a:xfrm>
+            <a:off x="692051" y="1074093"/>
+            <a:ext cx="7973389" cy="230981"/>
           </a:xfrm>
           <a:prstGeom prst="rect">
             <a:avLst/>
@@ -4950,98 +5441,368 @@
           <a:bodyPr wrap="square" lIns="0" tIns="0" rIns="0" bIns="0" rtlCol="0" anchor="t"/>
           <a:lstStyle/>
           <a:p>
-            <a:pPr algn="l" marL="342900" indent="-342900">
-              <a:lnSpc>
-                <a:spcPts val="1620"/>
-              </a:lnSpc>
-              <a:spcAft>
-                <a:spcPts val="300"/>
-              </a:spcAft>
-              <a:buSzPct val="100000"/>
-              <a:buChar char="•"/>
-            </a:pPr>
-            <a:r>
-              <a:rPr lang="en-US" sz="1200" b="1" dirty="0">
-                <a:solidFill>
-                  <a:srgbClr val="1C2833"/>
-                </a:solidFill>
-                <a:latin typeface="Arial" pitchFamily="34" charset="0"/>
-                <a:ea typeface="Arial" pitchFamily="34" charset="-122"/>
-                <a:cs typeface="Arial" pitchFamily="34" charset="-120"/>
-              </a:rPr>
-              <a:t>One tier up:</a:t>
-            </a:r>
-            <a:pPr algn="l" indent="0" marL="0">
-              <a:lnSpc>
-                <a:spcPts val="1620"/>
-              </a:lnSpc>
-              <a:spcAft>
-                <a:spcPts val="300"/>
-              </a:spcAft>
-              <a:buNone/>
-            </a:pPr>
-            <a:r>
-              <a:rPr lang="en-US" sz="1200" dirty="0">
-                <a:solidFill>
-                  <a:srgbClr val="1C2833"/>
-                </a:solidFill>
-                <a:latin typeface="Arial" pitchFamily="34" charset="0"/>
-                <a:ea typeface="Arial" pitchFamily="34" charset="-122"/>
-                <a:cs typeface="Arial" pitchFamily="34" charset="-120"/>
-              </a:rPr>
-              <a:t> Pairs who finish early help check others' projects against the rubric (specifically, the "method demonstrated correctly" criterion).</a:t>
-            </a:r>
-            <a:endParaRPr lang="en-US" sz="1200" dirty="0"/>
-          </a:p>
-          <a:p>
-            <a:pPr algn="l" marL="342900" indent="-342900">
-              <a:lnSpc>
-                <a:spcPts val="1620"/>
-              </a:lnSpc>
-              <a:spcAft>
-                <a:spcPts val="300"/>
-              </a:spcAft>
-              <a:buSzPct val="100000"/>
-              <a:buChar char="•"/>
-            </a:pPr>
-            <a:r>
-              <a:rPr lang="en-US" sz="1200" b="1" dirty="0">
-                <a:solidFill>
-                  <a:srgbClr val="1C2833"/>
-                </a:solidFill>
-                <a:latin typeface="Arial" pitchFamily="34" charset="0"/>
-                <a:ea typeface="Arial" pitchFamily="34" charset="-122"/>
-                <a:cs typeface="Arial" pitchFamily="34" charset="-120"/>
-              </a:rPr>
-              <a:t>One tier down:</a:t>
-            </a:r>
-            <a:pPr algn="l" indent="0" marL="0">
-              <a:lnSpc>
-                <a:spcPts val="1620"/>
-              </a:lnSpc>
-              <a:spcAft>
-                <a:spcPts val="300"/>
-              </a:spcAft>
-              <a:buNone/>
-            </a:pPr>
-            <a:r>
-              <a:rPr lang="en-US" sz="1200" dirty="0">
-                <a:solidFill>
-                  <a:srgbClr val="1C2833"/>
-                </a:solidFill>
-                <a:latin typeface="Arial" pitchFamily="34" charset="0"/>
-                <a:ea typeface="Arial" pitchFamily="34" charset="-122"/>
-                <a:cs typeface="Arial" pitchFamily="34" charset="-120"/>
-              </a:rPr>
-              <a:t> A pair that didn't quite finish presents a smaller artefact (e.g. 3×3 instead of 5×5). They still meet the citation and verification requirements.</a:t>
-            </a:r>
-            <a:endParaRPr lang="en-US" sz="1200" dirty="0"/>
-          </a:p>
-        </p:txBody>
-      </p:sp>
-      <p:sp>
-        <p:nvSpPr>
-          <p:cNvPr id="5" name="Text 3"/>
+            <a:pPr algn="l" indent="0" marL="0">
+              <a:lnSpc>
+                <a:spcPts val="1820"/>
+              </a:lnSpc>
+              <a:spcBef>
+                <a:spcPts val="300"/>
+              </a:spcBef>
+              <a:spcAft>
+                <a:spcPts val="300"/>
+              </a:spcAft>
+              <a:buNone/>
+            </a:pPr>
+            <a:r>
+              <a:rPr lang="en-US" sz="1300" b="1" i="1" dirty="0">
+                <a:solidFill>
+                  <a:srgbClr val="1C2833"/>
+                </a:solidFill>
+                <a:latin typeface="Georgia" pitchFamily="34" charset="0"/>
+                <a:ea typeface="Georgia" pitchFamily="34" charset="-122"/>
+                <a:cs typeface="Georgia" pitchFamily="34" charset="-120"/>
+              </a:rPr>
+              <a:t>Today is the share.</a:t>
+            </a:r>
+            <a:endParaRPr lang="en-US" sz="1300" dirty="0"/>
+          </a:p>
+        </p:txBody>
+      </p:sp>
+      <p:sp>
+        <p:nvSpPr>
+          <p:cNvPr id="7" name="Text 5"/>
+          <p:cNvSpPr/>
+          <p:nvPr/>
+        </p:nvSpPr>
+        <p:spPr>
+          <a:xfrm>
+            <a:off x="692051" y="1343174"/>
+            <a:ext cx="7973389" cy="230981"/>
+          </a:xfrm>
+          <a:prstGeom prst="rect">
+            <a:avLst/>
+          </a:prstGeom>
+          <a:noFill/>
+          <a:ln/>
+        </p:spPr>
+        <p:txBody>
+          <a:bodyPr wrap="square" lIns="0" tIns="0" rIns="0" bIns="0" rtlCol="0" anchor="t"/>
+          <a:lstStyle/>
+          <a:p>
+            <a:pPr algn="l" indent="0" marL="0">
+              <a:lnSpc>
+                <a:spcPts val="1820"/>
+              </a:lnSpc>
+              <a:spcBef>
+                <a:spcPts val="300"/>
+              </a:spcBef>
+              <a:spcAft>
+                <a:spcPts val="300"/>
+              </a:spcAft>
+              <a:buNone/>
+            </a:pPr>
+            <a:r>
+              <a:rPr lang="en-US" sz="1300" i="1" dirty="0">
+                <a:solidFill>
+                  <a:srgbClr val="1C2833"/>
+                </a:solidFill>
+                <a:latin typeface="Georgia" pitchFamily="34" charset="0"/>
+                <a:ea typeface="Georgia" pitchFamily="34" charset="-122"/>
+                <a:cs typeface="Georgia" pitchFamily="34" charset="-120"/>
+              </a:rPr>
+              <a:t>Bring:</a:t>
+            </a:r>
+            <a:endParaRPr lang="en-US" sz="1300" dirty="0"/>
+          </a:p>
+        </p:txBody>
+      </p:sp>
+      <p:sp>
+        <p:nvSpPr>
+          <p:cNvPr id="8" name="Text 6"/>
+          <p:cNvSpPr/>
+          <p:nvPr/>
+        </p:nvSpPr>
+        <p:spPr>
+          <a:xfrm>
+            <a:off x="692051" y="1612255"/>
+            <a:ext cx="7973389" cy="230981"/>
+          </a:xfrm>
+          <a:prstGeom prst="rect">
+            <a:avLst/>
+          </a:prstGeom>
+          <a:noFill/>
+          <a:ln/>
+        </p:spPr>
+        <p:txBody>
+          <a:bodyPr wrap="square" lIns="0" tIns="0" rIns="0" bIns="0" rtlCol="0" anchor="t"/>
+          <a:lstStyle/>
+          <a:p>
+            <a:pPr algn="l" indent="0" marL="0">
+              <a:lnSpc>
+                <a:spcPts val="1820"/>
+              </a:lnSpc>
+              <a:spcBef>
+                <a:spcPts val="300"/>
+              </a:spcBef>
+              <a:spcAft>
+                <a:spcPts val="300"/>
+              </a:spcAft>
+              <a:buNone/>
+            </a:pPr>
+            <a:r>
+              <a:rPr lang="en-US" sz="1300" i="1" dirty="0">
+                <a:solidFill>
+                  <a:srgbClr val="1C2833"/>
+                </a:solidFill>
+                <a:latin typeface="Georgia" pitchFamily="34" charset="0"/>
+                <a:ea typeface="Georgia" pitchFamily="34" charset="-122"/>
+                <a:cs typeface="Georgia" pitchFamily="34" charset="-120"/>
+              </a:rPr>
+              <a:t>Your project artefact (poster / video / written exposition).</a:t>
+            </a:r>
+            <a:endParaRPr lang="en-US" sz="1300" dirty="0"/>
+          </a:p>
+        </p:txBody>
+      </p:sp>
+      <p:sp>
+        <p:nvSpPr>
+          <p:cNvPr id="9" name="Text 7"/>
+          <p:cNvSpPr/>
+          <p:nvPr/>
+        </p:nvSpPr>
+        <p:spPr>
+          <a:xfrm>
+            <a:off x="692051" y="1881336"/>
+            <a:ext cx="7973389" cy="230981"/>
+          </a:xfrm>
+          <a:prstGeom prst="rect">
+            <a:avLst/>
+          </a:prstGeom>
+          <a:noFill/>
+          <a:ln/>
+        </p:spPr>
+        <p:txBody>
+          <a:bodyPr wrap="square" lIns="0" tIns="0" rIns="0" bIns="0" rtlCol="0" anchor="t"/>
+          <a:lstStyle/>
+          <a:p>
+            <a:pPr algn="l" indent="0" marL="0">
+              <a:lnSpc>
+                <a:spcPts val="1820"/>
+              </a:lnSpc>
+              <a:spcBef>
+                <a:spcPts val="300"/>
+              </a:spcBef>
+              <a:spcAft>
+                <a:spcPts val="300"/>
+              </a:spcAft>
+              <a:buNone/>
+            </a:pPr>
+            <a:r>
+              <a:rPr lang="en-US" sz="1300" i="1" dirty="0">
+                <a:solidFill>
+                  <a:srgbClr val="1C2833"/>
+                </a:solidFill>
+                <a:latin typeface="Georgia" pitchFamily="34" charset="0"/>
+                <a:ea typeface="Georgia" pitchFamily="34" charset="-122"/>
+                <a:cs typeface="Georgia" pitchFamily="34" charset="-120"/>
+              </a:rPr>
+              <a:t>Your two-minute presentation prepared.</a:t>
+            </a:r>
+            <a:endParaRPr lang="en-US" sz="1300" dirty="0"/>
+          </a:p>
+        </p:txBody>
+      </p:sp>
+      <p:sp>
+        <p:nvSpPr>
+          <p:cNvPr id="10" name="Text 8"/>
+          <p:cNvSpPr/>
+          <p:nvPr/>
+        </p:nvSpPr>
+        <p:spPr>
+          <a:xfrm>
+            <a:off x="692051" y="2150418"/>
+            <a:ext cx="7973389" cy="230981"/>
+          </a:xfrm>
+          <a:prstGeom prst="rect">
+            <a:avLst/>
+          </a:prstGeom>
+          <a:noFill/>
+          <a:ln/>
+        </p:spPr>
+        <p:txBody>
+          <a:bodyPr wrap="square" lIns="0" tIns="0" rIns="0" bIns="0" rtlCol="0" anchor="t"/>
+          <a:lstStyle/>
+          <a:p>
+            <a:pPr algn="l" indent="0" marL="0">
+              <a:lnSpc>
+                <a:spcPts val="1820"/>
+              </a:lnSpc>
+              <a:spcBef>
+                <a:spcPts val="300"/>
+              </a:spcBef>
+              <a:spcAft>
+                <a:spcPts val="300"/>
+              </a:spcAft>
+              <a:buNone/>
+            </a:pPr>
+            <a:r>
+              <a:rPr lang="en-US" sz="1300" i="1" dirty="0">
+                <a:solidFill>
+                  <a:srgbClr val="1C2833"/>
+                </a:solidFill>
+                <a:latin typeface="Georgia" pitchFamily="34" charset="0"/>
+                <a:ea typeface="Georgia" pitchFamily="34" charset="-122"/>
+                <a:cs typeface="Georgia" pitchFamily="34" charset="-120"/>
+              </a:rPr>
+              <a:t>Your full attention for your classmates' presentations — you will give feedback.</a:t>
+            </a:r>
+            <a:endParaRPr lang="en-US" sz="1300" dirty="0"/>
+          </a:p>
+        </p:txBody>
+      </p:sp>
+      <p:sp>
+        <p:nvSpPr>
+          <p:cNvPr id="11" name="Text 9"/>
+          <p:cNvSpPr/>
+          <p:nvPr/>
+        </p:nvSpPr>
+        <p:spPr>
+          <a:xfrm>
+            <a:off x="692051" y="2419499"/>
+            <a:ext cx="7973389" cy="461963"/>
+          </a:xfrm>
+          <a:prstGeom prst="rect">
+            <a:avLst/>
+          </a:prstGeom>
+          <a:noFill/>
+          <a:ln/>
+        </p:spPr>
+        <p:txBody>
+          <a:bodyPr wrap="square" lIns="0" tIns="0" rIns="0" bIns="0" rtlCol="0" anchor="t"/>
+          <a:lstStyle/>
+          <a:p>
+            <a:pPr algn="l" indent="0" marL="0">
+              <a:lnSpc>
+                <a:spcPts val="1820"/>
+              </a:lnSpc>
+              <a:spcBef>
+                <a:spcPts val="300"/>
+              </a:spcBef>
+              <a:spcAft>
+                <a:spcPts val="300"/>
+              </a:spcAft>
+              <a:buNone/>
+            </a:pPr>
+            <a:r>
+              <a:rPr lang="en-US" sz="1300" dirty="0">
+                <a:solidFill>
+                  <a:srgbClr val="1C2833"/>
+                </a:solidFill>
+                <a:latin typeface="Georgia" pitchFamily="34" charset="0"/>
+                <a:ea typeface="Georgia" pitchFamily="34" charset="-122"/>
+                <a:cs typeface="Georgia" pitchFamily="34" charset="-120"/>
+              </a:rPr>
+              <a:t>Reminder: </a:t>
+            </a:r>
+            <a:pPr algn="l" indent="0" marL="0">
+              <a:lnSpc>
+                <a:spcPts val="1820"/>
+              </a:lnSpc>
+              <a:spcBef>
+                <a:spcPts val="300"/>
+              </a:spcBef>
+              <a:spcAft>
+                <a:spcPts val="300"/>
+              </a:spcAft>
+              <a:buNone/>
+            </a:pPr>
+            <a:r>
+              <a:rPr lang="en-US" sz="1300" b="1" i="1" dirty="0">
+                <a:solidFill>
+                  <a:srgbClr val="1C2833"/>
+                </a:solidFill>
+                <a:latin typeface="Georgia" pitchFamily="34" charset="0"/>
+                <a:ea typeface="Georgia" pitchFamily="34" charset="-122"/>
+                <a:cs typeface="Georgia" pitchFamily="34" charset="-120"/>
+              </a:rPr>
+              <a:t>Verify before you present.</a:t>
+            </a:r>
+            <a:pPr algn="l" indent="0" marL="0">
+              <a:lnSpc>
+                <a:spcPts val="1820"/>
+              </a:lnSpc>
+              <a:spcBef>
+                <a:spcPts val="300"/>
+              </a:spcBef>
+              <a:spcAft>
+                <a:spcPts val="300"/>
+              </a:spcAft>
+              <a:buNone/>
+            </a:pPr>
+            <a:r>
+              <a:rPr lang="en-US" sz="1300" dirty="0">
+                <a:solidFill>
+                  <a:srgbClr val="1C2833"/>
+                </a:solidFill>
+                <a:latin typeface="Georgia" pitchFamily="34" charset="0"/>
+                <a:ea typeface="Georgia" pitchFamily="34" charset="-122"/>
+                <a:cs typeface="Georgia" pitchFamily="34" charset="-120"/>
+              </a:rPr>
+              <a:t> Sum at least 3 rows, 3 columns, and both diagonals out loud (or in your head). If they don't match the magic constant, fix the error </a:t>
+            </a:r>
+            <a:pPr algn="l" indent="0" marL="0">
+              <a:lnSpc>
+                <a:spcPts val="1820"/>
+              </a:lnSpc>
+              <a:spcBef>
+                <a:spcPts val="300"/>
+              </a:spcBef>
+              <a:spcAft>
+                <a:spcPts val="300"/>
+              </a:spcAft>
+              <a:buNone/>
+            </a:pPr>
+            <a:r>
+              <a:rPr lang="en-US" sz="1300" i="1" dirty="0">
+                <a:solidFill>
+                  <a:srgbClr val="1C2833"/>
+                </a:solidFill>
+                <a:latin typeface="Georgia" pitchFamily="34" charset="0"/>
+                <a:ea typeface="Georgia" pitchFamily="34" charset="-122"/>
+                <a:cs typeface="Georgia" pitchFamily="34" charset="-120"/>
+              </a:rPr>
+              <a:t>before</a:t>
+            </a:r>
+            <a:pPr algn="l" indent="0" marL="0">
+              <a:lnSpc>
+                <a:spcPts val="1820"/>
+              </a:lnSpc>
+              <a:spcBef>
+                <a:spcPts val="300"/>
+              </a:spcBef>
+              <a:spcAft>
+                <a:spcPts val="300"/>
+              </a:spcAft>
+              <a:buNone/>
+            </a:pPr>
+            <a:r>
+              <a:rPr lang="en-US" sz="1300" dirty="0">
+                <a:solidFill>
+                  <a:srgbClr val="1C2833"/>
+                </a:solidFill>
+                <a:latin typeface="Georgia" pitchFamily="34" charset="0"/>
+                <a:ea typeface="Georgia" pitchFamily="34" charset="-122"/>
+                <a:cs typeface="Georgia" pitchFamily="34" charset="-120"/>
+              </a:rPr>
+              <a:t> you stand up.</a:t>
+            </a:r>
+            <a:endParaRPr lang="en-US" sz="1300" dirty="0"/>
+          </a:p>
+        </p:txBody>
+      </p:sp>
+      <p:sp>
+        <p:nvSpPr>
+          <p:cNvPr id="12" name="Text 10"/>
           <p:cNvSpPr/>
           <p:nvPr/>
         </p:nvSpPr>
